--- a/Presentation.pptx
+++ b/Presentation.pptx
@@ -918,7 +918,8 @@
               <a:buNone/>
             </a:pPr>
             <a:r>
-              <a:t/>
+              <a:rPr lang="en-US"/>
+              <a:t>DatPT125</a:t>
             </a:r>
             <a:endParaRPr/>
           </a:p>
@@ -1072,10 +1073,19 @@
               <a:spcAft>
                 <a:spcPts val="0"/>
               </a:spcAft>
-              <a:buNone/>
-            </a:pPr>
-            <a:r>
-              <a:t/>
+              <a:buClr>
+                <a:schemeClr val="dk1"/>
+              </a:buClr>
+              <a:buFont typeface="Arial"/>
+              <a:buNone/>
+            </a:pPr>
+            <a:r>
+              <a:rPr lang="en-US">
+                <a:solidFill>
+                  <a:schemeClr val="dk1"/>
+                </a:solidFill>
+              </a:rPr>
+              <a:t>DatPT125</a:t>
             </a:r>
             <a:endParaRPr/>
           </a:p>
@@ -1229,10 +1239,19 @@
               <a:spcAft>
                 <a:spcPts val="0"/>
               </a:spcAft>
-              <a:buNone/>
-            </a:pPr>
-            <a:r>
-              <a:t/>
+              <a:buClr>
+                <a:schemeClr val="dk1"/>
+              </a:buClr>
+              <a:buFont typeface="Arial"/>
+              <a:buNone/>
+            </a:pPr>
+            <a:r>
+              <a:rPr lang="en-US">
+                <a:solidFill>
+                  <a:schemeClr val="dk1"/>
+                </a:solidFill>
+              </a:rPr>
+              <a:t>DatPT125</a:t>
             </a:r>
             <a:endParaRPr/>
           </a:p>
@@ -1386,10 +1405,19 @@
               <a:spcAft>
                 <a:spcPts val="0"/>
               </a:spcAft>
-              <a:buNone/>
-            </a:pPr>
-            <a:r>
-              <a:t/>
+              <a:buClr>
+                <a:schemeClr val="dk1"/>
+              </a:buClr>
+              <a:buFont typeface="Arial"/>
+              <a:buNone/>
+            </a:pPr>
+            <a:r>
+              <a:rPr lang="en-US">
+                <a:solidFill>
+                  <a:schemeClr val="dk1"/>
+                </a:solidFill>
+              </a:rPr>
+              <a:t>DatPT125</a:t>
             </a:r>
             <a:endParaRPr/>
           </a:p>
@@ -1543,10 +1571,19 @@
               <a:spcAft>
                 <a:spcPts val="0"/>
               </a:spcAft>
-              <a:buNone/>
-            </a:pPr>
-            <a:r>
-              <a:t/>
+              <a:buClr>
+                <a:schemeClr val="dk1"/>
+              </a:buClr>
+              <a:buFont typeface="Arial"/>
+              <a:buNone/>
+            </a:pPr>
+            <a:r>
+              <a:rPr lang="en-US">
+                <a:solidFill>
+                  <a:schemeClr val="dk1"/>
+                </a:solidFill>
+              </a:rPr>
+              <a:t>DatPT125</a:t>
             </a:r>
             <a:endParaRPr/>
           </a:p>
@@ -1700,10 +1737,19 @@
               <a:spcAft>
                 <a:spcPts val="0"/>
               </a:spcAft>
-              <a:buNone/>
-            </a:pPr>
-            <a:r>
-              <a:t/>
+              <a:buClr>
+                <a:schemeClr val="dk1"/>
+              </a:buClr>
+              <a:buFont typeface="Arial"/>
+              <a:buNone/>
+            </a:pPr>
+            <a:r>
+              <a:rPr lang="en-US">
+                <a:solidFill>
+                  <a:schemeClr val="dk1"/>
+                </a:solidFill>
+              </a:rPr>
+              <a:t>DatPT125</a:t>
             </a:r>
             <a:endParaRPr/>
           </a:p>
@@ -1811,7 +1857,8 @@
               <a:buNone/>
             </a:pPr>
             <a:r>
-              <a:t/>
+              <a:rPr lang="en-US"/>
+              <a:t>AnhNH101</a:t>
             </a:r>
             <a:endParaRPr/>
           </a:p>
@@ -1907,10 +1954,20 @@
               <a:spcAft>
                 <a:spcPts val="0"/>
               </a:spcAft>
-              <a:buNone/>
-            </a:pPr>
-            <a:r>
-              <a:t/>
+              <a:buClr>
+                <a:schemeClr val="dk1"/>
+              </a:buClr>
+              <a:buSzPts val="1100"/>
+              <a:buFont typeface="Arial"/>
+              <a:buNone/>
+            </a:pPr>
+            <a:r>
+              <a:rPr lang="en-US">
+                <a:solidFill>
+                  <a:schemeClr val="dk1"/>
+                </a:solidFill>
+              </a:rPr>
+              <a:t>AnhNH101</a:t>
             </a:r>
             <a:endParaRPr/>
           </a:p>
@@ -2006,10 +2063,20 @@
               <a:spcAft>
                 <a:spcPts val="0"/>
               </a:spcAft>
-              <a:buNone/>
-            </a:pPr>
-            <a:r>
-              <a:t/>
+              <a:buClr>
+                <a:schemeClr val="dk1"/>
+              </a:buClr>
+              <a:buSzPts val="1100"/>
+              <a:buFont typeface="Arial"/>
+              <a:buNone/>
+            </a:pPr>
+            <a:r>
+              <a:rPr lang="en-US">
+                <a:solidFill>
+                  <a:schemeClr val="dk1"/>
+                </a:solidFill>
+              </a:rPr>
+              <a:t>AnhNH101</a:t>
             </a:r>
             <a:endParaRPr/>
           </a:p>
@@ -2105,10 +2172,20 @@
               <a:spcAft>
                 <a:spcPts val="0"/>
               </a:spcAft>
-              <a:buNone/>
-            </a:pPr>
-            <a:r>
-              <a:t/>
+              <a:buClr>
+                <a:schemeClr val="dk1"/>
+              </a:buClr>
+              <a:buSzPts val="1100"/>
+              <a:buFont typeface="Arial"/>
+              <a:buNone/>
+            </a:pPr>
+            <a:r>
+              <a:rPr lang="en-US">
+                <a:solidFill>
+                  <a:schemeClr val="dk1"/>
+                </a:solidFill>
+              </a:rPr>
+              <a:t>AnhNH101</a:t>
             </a:r>
             <a:endParaRPr/>
           </a:p>
@@ -2176,7 +2253,7 @@
       </p:grpSpPr>
       <p:sp>
         <p:nvSpPr>
-          <p:cNvPr id="92" name="Google Shape;92;p3:notes"/>
+          <p:cNvPr id="92" name="Google Shape;92;p2:notes"/>
           <p:cNvSpPr txBox="1"/>
           <p:nvPr>
             <p:ph idx="1" type="body"/>
@@ -2215,7 +2292,7 @@
       </p:sp>
       <p:sp>
         <p:nvSpPr>
-          <p:cNvPr id="93" name="Google Shape;93;p3:notes"/>
+          <p:cNvPr id="93" name="Google Shape;93;p2:notes"/>
           <p:cNvSpPr/>
           <p:nvPr>
             <p:ph idx="2" type="sldImg"/>
@@ -2306,7 +2383,8 @@
               <a:buNone/>
             </a:pPr>
             <a:r>
-              <a:t/>
+              <a:rPr lang="en-US"/>
+              <a:t>QuanNH40</a:t>
             </a:r>
             <a:endParaRPr/>
           </a:p>
@@ -2402,10 +2480,20 @@
               <a:spcAft>
                 <a:spcPts val="0"/>
               </a:spcAft>
-              <a:buNone/>
-            </a:pPr>
-            <a:r>
-              <a:t/>
+              <a:buClr>
+                <a:schemeClr val="dk1"/>
+              </a:buClr>
+              <a:buSzPts val="1100"/>
+              <a:buFont typeface="Arial"/>
+              <a:buNone/>
+            </a:pPr>
+            <a:r>
+              <a:rPr lang="en-US">
+                <a:solidFill>
+                  <a:schemeClr val="dk1"/>
+                </a:solidFill>
+              </a:rPr>
+              <a:t>QuanNH40</a:t>
             </a:r>
             <a:endParaRPr/>
           </a:p>
@@ -2501,10 +2589,20 @@
               <a:spcAft>
                 <a:spcPts val="0"/>
               </a:spcAft>
-              <a:buNone/>
-            </a:pPr>
-            <a:r>
-              <a:t/>
+              <a:buClr>
+                <a:schemeClr val="dk1"/>
+              </a:buClr>
+              <a:buSzPts val="1100"/>
+              <a:buFont typeface="Arial"/>
+              <a:buNone/>
+            </a:pPr>
+            <a:r>
+              <a:rPr lang="en-US">
+                <a:solidFill>
+                  <a:schemeClr val="dk1"/>
+                </a:solidFill>
+              </a:rPr>
+              <a:t>QuanNH40</a:t>
             </a:r>
             <a:endParaRPr/>
           </a:p>
@@ -2600,10 +2698,20 @@
               <a:spcAft>
                 <a:spcPts val="0"/>
               </a:spcAft>
-              <a:buNone/>
-            </a:pPr>
-            <a:r>
-              <a:t/>
+              <a:buClr>
+                <a:schemeClr val="dk1"/>
+              </a:buClr>
+              <a:buSzPts val="1100"/>
+              <a:buFont typeface="Arial"/>
+              <a:buNone/>
+            </a:pPr>
+            <a:r>
+              <a:rPr lang="en-US">
+                <a:solidFill>
+                  <a:schemeClr val="dk1"/>
+                </a:solidFill>
+              </a:rPr>
+              <a:t>QuanNH40</a:t>
             </a:r>
             <a:endParaRPr/>
           </a:p>
@@ -2954,7 +3062,7 @@
   <p:cSld>
     <p:spTree>
       <p:nvGrpSpPr>
-        <p:cNvPr id="100" name="Shape 100"/>
+        <p:cNvPr id="128" name="Shape 128"/>
         <p:cNvGrpSpPr/>
         <p:nvPr/>
       </p:nvGrpSpPr>
@@ -2968,7 +3076,7 @@
       </p:grpSpPr>
       <p:sp>
         <p:nvSpPr>
-          <p:cNvPr id="101" name="Google Shape;101;p2:notes"/>
+          <p:cNvPr id="129" name="Google Shape;129;p3:notes"/>
           <p:cNvSpPr txBox="1"/>
           <p:nvPr>
             <p:ph idx="1" type="body"/>
@@ -2999,7 +3107,8 @@
               <a:buNone/>
             </a:pPr>
             <a:r>
-              <a:t/>
+              <a:rPr lang="en-US"/>
+              <a:t>QuanNH40</a:t>
             </a:r>
             <a:endParaRPr/>
           </a:p>
@@ -3007,7 +3116,7 @@
       </p:sp>
       <p:sp>
         <p:nvSpPr>
-          <p:cNvPr id="102" name="Google Shape;102;p2:notes"/>
+          <p:cNvPr id="130" name="Google Shape;130;p3:notes"/>
           <p:cNvSpPr/>
           <p:nvPr>
             <p:ph idx="2" type="sldImg"/>
@@ -3098,7 +3207,8 @@
               <a:buNone/>
             </a:pPr>
             <a:r>
-              <a:t/>
+              <a:rPr lang="en-US"/>
+              <a:t>QuanNH40</a:t>
             </a:r>
             <a:endParaRPr/>
           </a:p>
@@ -3197,7 +3307,8 @@
               <a:buNone/>
             </a:pPr>
             <a:r>
-              <a:t/>
+              <a:rPr lang="en-US"/>
+              <a:t>QuanNH40</a:t>
             </a:r>
             <a:endParaRPr/>
           </a:p>
@@ -3296,7 +3407,8 @@
               <a:buNone/>
             </a:pPr>
             <a:r>
-              <a:t/>
+              <a:rPr lang="en-US"/>
+              <a:t>ThangLC9</a:t>
             </a:r>
             <a:endParaRPr/>
           </a:p>
@@ -3395,7 +3507,8 @@
               <a:buNone/>
             </a:pPr>
             <a:r>
-              <a:t/>
+              <a:rPr lang="en-US"/>
+              <a:t>ThangLC9</a:t>
             </a:r>
             <a:endParaRPr/>
           </a:p>
@@ -3494,7 +3607,8 @@
               <a:buNone/>
             </a:pPr>
             <a:r>
-              <a:t/>
+              <a:rPr lang="en-US"/>
+              <a:t>ThangPD17</a:t>
             </a:r>
             <a:endParaRPr/>
           </a:p>
@@ -3590,10 +3704,20 @@
               <a:spcAft>
                 <a:spcPts val="0"/>
               </a:spcAft>
-              <a:buNone/>
-            </a:pPr>
-            <a:r>
-              <a:t/>
+              <a:buClr>
+                <a:schemeClr val="dk1"/>
+              </a:buClr>
+              <a:buSzPts val="1100"/>
+              <a:buFont typeface="Arial"/>
+              <a:buNone/>
+            </a:pPr>
+            <a:r>
+              <a:rPr lang="en-US">
+                <a:solidFill>
+                  <a:schemeClr val="dk1"/>
+                </a:solidFill>
+              </a:rPr>
+              <a:t>ThangPD17</a:t>
             </a:r>
             <a:endParaRPr/>
           </a:p>
@@ -24177,7 +24301,7 @@
                 <a:cs typeface="Calibri"/>
                 <a:sym typeface="Calibri"/>
               </a:rPr>
-              <a:t>Problem Statement</a:t>
+              <a:t>Agenda</a:t>
             </a:r>
             <a:endParaRPr/>
           </a:p>
@@ -24186,56 +24310,6 @@
       <p:sp>
         <p:nvSpPr>
           <p:cNvPr id="97" name="Google Shape;97;p15"/>
-          <p:cNvSpPr txBox="1"/>
-          <p:nvPr/>
-        </p:nvSpPr>
-        <p:spPr>
-          <a:xfrm>
-            <a:off x="548640" y="640080"/>
-            <a:ext cx="10972800" cy="369300"/>
-          </a:xfrm>
-          <a:prstGeom prst="rect">
-            <a:avLst/>
-          </a:prstGeom>
-          <a:noFill/>
-          <a:ln>
-            <a:noFill/>
-          </a:ln>
-        </p:spPr>
-        <p:txBody>
-          <a:bodyPr anchorCtr="0" anchor="t" bIns="45700" lIns="91425" spcFirstLastPara="1" rIns="91425" wrap="square" tIns="45700">
-            <a:spAutoFit/>
-          </a:bodyPr>
-          <a:lstStyle/>
-          <a:p>
-            <a:pPr indent="0" lvl="0" marL="0" marR="0" rtl="0" algn="l">
-              <a:spcBef>
-                <a:spcPts val="0"/>
-              </a:spcBef>
-              <a:spcAft>
-                <a:spcPts val="0"/>
-              </a:spcAft>
-              <a:buNone/>
-            </a:pPr>
-            <a:r>
-              <a:rPr b="0" i="0" lang="en-US" sz="1800" u="none" cap="none" strike="noStrike">
-                <a:solidFill>
-                  <a:srgbClr val="BBCCDD"/>
-                </a:solidFill>
-                <a:latin typeface="Calibri"/>
-                <a:ea typeface="Calibri"/>
-                <a:cs typeface="Calibri"/>
-                <a:sym typeface="Calibri"/>
-              </a:rPr>
-              <a:t>What challenges does the customer face today?</a:t>
-            </a:r>
-            <a:endParaRPr sz="1800"/>
-          </a:p>
-        </p:txBody>
-      </p:sp>
-      <p:sp>
-        <p:nvSpPr>
-          <p:cNvPr id="98" name="Google Shape;98;p15"/>
           <p:cNvSpPr/>
           <p:nvPr/>
         </p:nvSpPr>
@@ -24286,24 +24360,128 @@
           </a:p>
         </p:txBody>
       </p:sp>
-      <p:pic>
-        <p:nvPicPr>
+      <p:sp>
+        <p:nvSpPr>
+          <p:cNvPr id="98" name="Google Shape;98;p15"/>
+          <p:cNvSpPr/>
+          <p:nvPr/>
+        </p:nvSpPr>
+        <p:spPr>
+          <a:xfrm>
+            <a:off x="731520" y="1417320"/>
+            <a:ext cx="10515600" cy="658368"/>
+          </a:xfrm>
+          <a:prstGeom prst="roundRect">
+            <a:avLst>
+              <a:gd fmla="val 16667" name="adj"/>
+            </a:avLst>
+          </a:prstGeom>
+          <a:solidFill>
+            <a:srgbClr val="FFFFFF"/>
+          </a:solidFill>
+          <a:ln cap="flat" cmpd="sng" w="12700">
+            <a:solidFill>
+              <a:srgbClr val="DDDDDD"/>
+            </a:solidFill>
+            <a:prstDash val="solid"/>
+            <a:round/>
+            <a:headEnd len="sm" w="sm" type="none"/>
+            <a:tailEnd len="sm" w="sm" type="none"/>
+          </a:ln>
+        </p:spPr>
+        <p:txBody>
+          <a:bodyPr anchorCtr="0" anchor="ctr" bIns="45700" lIns="91425" spcFirstLastPara="1" rIns="91425" wrap="square" tIns="45700">
+            <a:noAutofit/>
+          </a:bodyPr>
+          <a:lstStyle/>
+          <a:p>
+            <a:pPr indent="0" lvl="0" marL="0" marR="0" rtl="0" algn="ctr">
+              <a:spcBef>
+                <a:spcPts val="0"/>
+              </a:spcBef>
+              <a:spcAft>
+                <a:spcPts val="0"/>
+              </a:spcAft>
+              <a:buNone/>
+            </a:pPr>
+            <a:r>
+              <a:t/>
+            </a:r>
+            <a:endParaRPr b="0" i="0" sz="1800" u="none" cap="none" strike="noStrike">
+              <a:solidFill>
+                <a:schemeClr val="dk1"/>
+              </a:solidFill>
+              <a:latin typeface="Calibri"/>
+              <a:ea typeface="Calibri"/>
+              <a:cs typeface="Calibri"/>
+              <a:sym typeface="Calibri"/>
+            </a:endParaRPr>
+          </a:p>
+        </p:txBody>
+      </p:sp>
+      <p:sp>
+        <p:nvSpPr>
           <p:cNvPr id="99" name="Google Shape;99;p15"/>
-          <p:cNvPicPr preferRelativeResize="0"/>
-          <p:nvPr/>
-        </p:nvPicPr>
-        <p:blipFill>
-          <a:blip r:embed="rId3">
-            <a:alphaModFix/>
-          </a:blip>
-          <a:stretch>
-            <a:fillRect/>
-          </a:stretch>
-        </p:blipFill>
-        <p:spPr>
-          <a:xfrm>
-            <a:off x="2411266" y="1254760"/>
-            <a:ext cx="6961085" cy="5450840"/>
+          <p:cNvSpPr/>
+          <p:nvPr/>
+        </p:nvSpPr>
+        <p:spPr>
+          <a:xfrm>
+            <a:off x="914400" y="1517904"/>
+            <a:ext cx="457200" cy="457200"/>
+          </a:xfrm>
+          <a:prstGeom prst="roundRect">
+            <a:avLst>
+              <a:gd fmla="val 16667" name="adj"/>
+            </a:avLst>
+          </a:prstGeom>
+          <a:solidFill>
+            <a:srgbClr val="115594"/>
+          </a:solidFill>
+          <a:ln>
+            <a:noFill/>
+          </a:ln>
+        </p:spPr>
+        <p:txBody>
+          <a:bodyPr anchorCtr="0" anchor="ctr" bIns="45700" lIns="91425" spcFirstLastPara="1" rIns="91425" wrap="square" tIns="45700">
+            <a:noAutofit/>
+          </a:bodyPr>
+          <a:lstStyle/>
+          <a:p>
+            <a:pPr indent="0" lvl="0" marL="0" marR="0" rtl="0" algn="ctr">
+              <a:spcBef>
+                <a:spcPts val="0"/>
+              </a:spcBef>
+              <a:spcAft>
+                <a:spcPts val="0"/>
+              </a:spcAft>
+              <a:buNone/>
+            </a:pPr>
+            <a:r>
+              <a:t/>
+            </a:r>
+            <a:endParaRPr b="0" i="0" sz="1800" u="none" cap="none" strike="noStrike">
+              <a:solidFill>
+                <a:schemeClr val="dk1"/>
+              </a:solidFill>
+              <a:latin typeface="Calibri"/>
+              <a:ea typeface="Calibri"/>
+              <a:cs typeface="Calibri"/>
+              <a:sym typeface="Calibri"/>
+            </a:endParaRPr>
+          </a:p>
+        </p:txBody>
+      </p:sp>
+      <p:sp>
+        <p:nvSpPr>
+          <p:cNvPr id="100" name="Google Shape;100;p15"/>
+          <p:cNvSpPr txBox="1"/>
+          <p:nvPr/>
+        </p:nvSpPr>
+        <p:spPr>
+          <a:xfrm>
+            <a:off x="914400" y="1517904"/>
+            <a:ext cx="457200" cy="457200"/>
           </a:xfrm>
           <a:prstGeom prst="rect">
             <a:avLst/>
@@ -24313,7 +24491,1447 @@
             <a:noFill/>
           </a:ln>
         </p:spPr>
-      </p:pic>
+        <p:txBody>
+          <a:bodyPr anchorCtr="0" anchor="t" bIns="45700" lIns="91425" spcFirstLastPara="1" rIns="91425" wrap="square" tIns="45700">
+            <a:spAutoFit/>
+          </a:bodyPr>
+          <a:lstStyle/>
+          <a:p>
+            <a:pPr indent="0" lvl="0" marL="0" marR="0" rtl="0" algn="ctr">
+              <a:spcBef>
+                <a:spcPts val="0"/>
+              </a:spcBef>
+              <a:spcAft>
+                <a:spcPts val="0"/>
+              </a:spcAft>
+              <a:buNone/>
+            </a:pPr>
+            <a:r>
+              <a:rPr b="1" i="0" lang="en-US" sz="1800" u="none" cap="none" strike="noStrike">
+                <a:solidFill>
+                  <a:srgbClr val="FFFFFF"/>
+                </a:solidFill>
+                <a:latin typeface="Calibri"/>
+                <a:ea typeface="Calibri"/>
+                <a:cs typeface="Calibri"/>
+                <a:sym typeface="Calibri"/>
+              </a:rPr>
+              <a:t>1</a:t>
+            </a:r>
+            <a:endParaRPr/>
+          </a:p>
+        </p:txBody>
+      </p:sp>
+      <p:sp>
+        <p:nvSpPr>
+          <p:cNvPr id="101" name="Google Shape;101;p15"/>
+          <p:cNvSpPr txBox="1"/>
+          <p:nvPr/>
+        </p:nvSpPr>
+        <p:spPr>
+          <a:xfrm>
+            <a:off x="1554480" y="1554480"/>
+            <a:ext cx="7315200" cy="384048"/>
+          </a:xfrm>
+          <a:prstGeom prst="rect">
+            <a:avLst/>
+          </a:prstGeom>
+          <a:noFill/>
+          <a:ln>
+            <a:noFill/>
+          </a:ln>
+        </p:spPr>
+        <p:txBody>
+          <a:bodyPr anchorCtr="0" anchor="t" bIns="45700" lIns="91425" spcFirstLastPara="1" rIns="91425" wrap="square" tIns="45700">
+            <a:spAutoFit/>
+          </a:bodyPr>
+          <a:lstStyle/>
+          <a:p>
+            <a:pPr indent="0" lvl="0" marL="0" marR="0" rtl="0" algn="l">
+              <a:spcBef>
+                <a:spcPts val="0"/>
+              </a:spcBef>
+              <a:spcAft>
+                <a:spcPts val="0"/>
+              </a:spcAft>
+              <a:buNone/>
+            </a:pPr>
+            <a:r>
+              <a:rPr b="1" i="0" lang="en-US" sz="1600" u="none" cap="none" strike="noStrike">
+                <a:solidFill>
+                  <a:srgbClr val="0E3A66"/>
+                </a:solidFill>
+                <a:latin typeface="Calibri"/>
+                <a:ea typeface="Calibri"/>
+                <a:cs typeface="Calibri"/>
+                <a:sym typeface="Calibri"/>
+              </a:rPr>
+              <a:t>Problem Statement &amp; Customer Challenges</a:t>
+            </a:r>
+            <a:endParaRPr/>
+          </a:p>
+        </p:txBody>
+      </p:sp>
+      <p:sp>
+        <p:nvSpPr>
+          <p:cNvPr id="102" name="Google Shape;102;p15"/>
+          <p:cNvSpPr txBox="1"/>
+          <p:nvPr/>
+        </p:nvSpPr>
+        <p:spPr>
+          <a:xfrm>
+            <a:off x="9601200" y="1554480"/>
+            <a:ext cx="1371600" cy="384048"/>
+          </a:xfrm>
+          <a:prstGeom prst="rect">
+            <a:avLst/>
+          </a:prstGeom>
+          <a:noFill/>
+          <a:ln>
+            <a:noFill/>
+          </a:ln>
+        </p:spPr>
+        <p:txBody>
+          <a:bodyPr anchorCtr="0" anchor="t" bIns="45700" lIns="91425" spcFirstLastPara="1" rIns="91425" wrap="square" tIns="45700">
+            <a:spAutoFit/>
+          </a:bodyPr>
+          <a:lstStyle/>
+          <a:p>
+            <a:pPr indent="0" lvl="0" marL="0" marR="0" rtl="0" algn="r">
+              <a:spcBef>
+                <a:spcPts val="0"/>
+              </a:spcBef>
+              <a:spcAft>
+                <a:spcPts val="0"/>
+              </a:spcAft>
+              <a:buNone/>
+            </a:pPr>
+            <a:r>
+              <a:rPr b="0" i="0" lang="en-US" sz="1400" u="none" cap="none" strike="noStrike">
+                <a:solidFill>
+                  <a:srgbClr val="0F766E"/>
+                </a:solidFill>
+                <a:latin typeface="Calibri"/>
+                <a:ea typeface="Calibri"/>
+                <a:cs typeface="Calibri"/>
+                <a:sym typeface="Calibri"/>
+              </a:rPr>
+              <a:t>3 min</a:t>
+            </a:r>
+            <a:endParaRPr/>
+          </a:p>
+        </p:txBody>
+      </p:sp>
+      <p:sp>
+        <p:nvSpPr>
+          <p:cNvPr id="103" name="Google Shape;103;p15"/>
+          <p:cNvSpPr/>
+          <p:nvPr/>
+        </p:nvSpPr>
+        <p:spPr>
+          <a:xfrm>
+            <a:off x="731520" y="2221992"/>
+            <a:ext cx="10515600" cy="658368"/>
+          </a:xfrm>
+          <a:prstGeom prst="roundRect">
+            <a:avLst>
+              <a:gd fmla="val 16667" name="adj"/>
+            </a:avLst>
+          </a:prstGeom>
+          <a:solidFill>
+            <a:srgbClr val="FFFFFF"/>
+          </a:solidFill>
+          <a:ln cap="flat" cmpd="sng" w="12700">
+            <a:solidFill>
+              <a:srgbClr val="DDDDDD"/>
+            </a:solidFill>
+            <a:prstDash val="solid"/>
+            <a:round/>
+            <a:headEnd len="sm" w="sm" type="none"/>
+            <a:tailEnd len="sm" w="sm" type="none"/>
+          </a:ln>
+        </p:spPr>
+        <p:txBody>
+          <a:bodyPr anchorCtr="0" anchor="ctr" bIns="45700" lIns="91425" spcFirstLastPara="1" rIns="91425" wrap="square" tIns="45700">
+            <a:noAutofit/>
+          </a:bodyPr>
+          <a:lstStyle/>
+          <a:p>
+            <a:pPr indent="0" lvl="0" marL="0" marR="0" rtl="0" algn="ctr">
+              <a:spcBef>
+                <a:spcPts val="0"/>
+              </a:spcBef>
+              <a:spcAft>
+                <a:spcPts val="0"/>
+              </a:spcAft>
+              <a:buNone/>
+            </a:pPr>
+            <a:r>
+              <a:t/>
+            </a:r>
+            <a:endParaRPr b="0" i="0" sz="1800" u="none" cap="none" strike="noStrike">
+              <a:solidFill>
+                <a:schemeClr val="dk1"/>
+              </a:solidFill>
+              <a:latin typeface="Calibri"/>
+              <a:ea typeface="Calibri"/>
+              <a:cs typeface="Calibri"/>
+              <a:sym typeface="Calibri"/>
+            </a:endParaRPr>
+          </a:p>
+        </p:txBody>
+      </p:sp>
+      <p:sp>
+        <p:nvSpPr>
+          <p:cNvPr id="104" name="Google Shape;104;p15"/>
+          <p:cNvSpPr/>
+          <p:nvPr/>
+        </p:nvSpPr>
+        <p:spPr>
+          <a:xfrm>
+            <a:off x="914400" y="2322576"/>
+            <a:ext cx="457200" cy="457200"/>
+          </a:xfrm>
+          <a:prstGeom prst="roundRect">
+            <a:avLst>
+              <a:gd fmla="val 16667" name="adj"/>
+            </a:avLst>
+          </a:prstGeom>
+          <a:solidFill>
+            <a:srgbClr val="115594"/>
+          </a:solidFill>
+          <a:ln>
+            <a:noFill/>
+          </a:ln>
+        </p:spPr>
+        <p:txBody>
+          <a:bodyPr anchorCtr="0" anchor="ctr" bIns="45700" lIns="91425" spcFirstLastPara="1" rIns="91425" wrap="square" tIns="45700">
+            <a:noAutofit/>
+          </a:bodyPr>
+          <a:lstStyle/>
+          <a:p>
+            <a:pPr indent="0" lvl="0" marL="0" marR="0" rtl="0" algn="ctr">
+              <a:spcBef>
+                <a:spcPts val="0"/>
+              </a:spcBef>
+              <a:spcAft>
+                <a:spcPts val="0"/>
+              </a:spcAft>
+              <a:buNone/>
+            </a:pPr>
+            <a:r>
+              <a:t/>
+            </a:r>
+            <a:endParaRPr b="0" i="0" sz="1800" u="none" cap="none" strike="noStrike">
+              <a:solidFill>
+                <a:schemeClr val="dk1"/>
+              </a:solidFill>
+              <a:latin typeface="Calibri"/>
+              <a:ea typeface="Calibri"/>
+              <a:cs typeface="Calibri"/>
+              <a:sym typeface="Calibri"/>
+            </a:endParaRPr>
+          </a:p>
+        </p:txBody>
+      </p:sp>
+      <p:sp>
+        <p:nvSpPr>
+          <p:cNvPr id="105" name="Google Shape;105;p15"/>
+          <p:cNvSpPr txBox="1"/>
+          <p:nvPr/>
+        </p:nvSpPr>
+        <p:spPr>
+          <a:xfrm>
+            <a:off x="914400" y="2322576"/>
+            <a:ext cx="457200" cy="457200"/>
+          </a:xfrm>
+          <a:prstGeom prst="rect">
+            <a:avLst/>
+          </a:prstGeom>
+          <a:noFill/>
+          <a:ln>
+            <a:noFill/>
+          </a:ln>
+        </p:spPr>
+        <p:txBody>
+          <a:bodyPr anchorCtr="0" anchor="t" bIns="45700" lIns="91425" spcFirstLastPara="1" rIns="91425" wrap="square" tIns="45700">
+            <a:spAutoFit/>
+          </a:bodyPr>
+          <a:lstStyle/>
+          <a:p>
+            <a:pPr indent="0" lvl="0" marL="0" marR="0" rtl="0" algn="ctr">
+              <a:spcBef>
+                <a:spcPts val="0"/>
+              </a:spcBef>
+              <a:spcAft>
+                <a:spcPts val="0"/>
+              </a:spcAft>
+              <a:buNone/>
+            </a:pPr>
+            <a:r>
+              <a:rPr b="1" i="0" lang="en-US" sz="1800" u="none" cap="none" strike="noStrike">
+                <a:solidFill>
+                  <a:srgbClr val="FFFFFF"/>
+                </a:solidFill>
+                <a:latin typeface="Calibri"/>
+                <a:ea typeface="Calibri"/>
+                <a:cs typeface="Calibri"/>
+                <a:sym typeface="Calibri"/>
+              </a:rPr>
+              <a:t>2</a:t>
+            </a:r>
+            <a:endParaRPr/>
+          </a:p>
+        </p:txBody>
+      </p:sp>
+      <p:sp>
+        <p:nvSpPr>
+          <p:cNvPr id="106" name="Google Shape;106;p15"/>
+          <p:cNvSpPr txBox="1"/>
+          <p:nvPr/>
+        </p:nvSpPr>
+        <p:spPr>
+          <a:xfrm>
+            <a:off x="1554480" y="2359152"/>
+            <a:ext cx="7315200" cy="384048"/>
+          </a:xfrm>
+          <a:prstGeom prst="rect">
+            <a:avLst/>
+          </a:prstGeom>
+          <a:noFill/>
+          <a:ln>
+            <a:noFill/>
+          </a:ln>
+        </p:spPr>
+        <p:txBody>
+          <a:bodyPr anchorCtr="0" anchor="t" bIns="45700" lIns="91425" spcFirstLastPara="1" rIns="91425" wrap="square" tIns="45700">
+            <a:spAutoFit/>
+          </a:bodyPr>
+          <a:lstStyle/>
+          <a:p>
+            <a:pPr indent="0" lvl="0" marL="0" marR="0" rtl="0" algn="l">
+              <a:spcBef>
+                <a:spcPts val="0"/>
+              </a:spcBef>
+              <a:spcAft>
+                <a:spcPts val="0"/>
+              </a:spcAft>
+              <a:buNone/>
+            </a:pPr>
+            <a:r>
+              <a:rPr b="1" i="0" lang="en-US" sz="1600" u="none" cap="none" strike="noStrike">
+                <a:solidFill>
+                  <a:srgbClr val="0E3A66"/>
+                </a:solidFill>
+                <a:latin typeface="Calibri"/>
+                <a:ea typeface="Calibri"/>
+                <a:cs typeface="Calibri"/>
+                <a:sym typeface="Calibri"/>
+              </a:rPr>
+              <a:t>Requirements: Functional, Non-Functional, Constraints &amp; Assumptions</a:t>
+            </a:r>
+            <a:endParaRPr/>
+          </a:p>
+        </p:txBody>
+      </p:sp>
+      <p:sp>
+        <p:nvSpPr>
+          <p:cNvPr id="107" name="Google Shape;107;p15"/>
+          <p:cNvSpPr txBox="1"/>
+          <p:nvPr/>
+        </p:nvSpPr>
+        <p:spPr>
+          <a:xfrm>
+            <a:off x="9601200" y="2359152"/>
+            <a:ext cx="1371600" cy="384048"/>
+          </a:xfrm>
+          <a:prstGeom prst="rect">
+            <a:avLst/>
+          </a:prstGeom>
+          <a:noFill/>
+          <a:ln>
+            <a:noFill/>
+          </a:ln>
+        </p:spPr>
+        <p:txBody>
+          <a:bodyPr anchorCtr="0" anchor="t" bIns="45700" lIns="91425" spcFirstLastPara="1" rIns="91425" wrap="square" tIns="45700">
+            <a:spAutoFit/>
+          </a:bodyPr>
+          <a:lstStyle/>
+          <a:p>
+            <a:pPr indent="0" lvl="0" marL="0" marR="0" rtl="0" algn="r">
+              <a:spcBef>
+                <a:spcPts val="0"/>
+              </a:spcBef>
+              <a:spcAft>
+                <a:spcPts val="0"/>
+              </a:spcAft>
+              <a:buNone/>
+            </a:pPr>
+            <a:r>
+              <a:rPr b="0" i="0" lang="en-US" sz="1400" u="none" cap="none" strike="noStrike">
+                <a:solidFill>
+                  <a:srgbClr val="0F766E"/>
+                </a:solidFill>
+                <a:latin typeface="Calibri"/>
+                <a:ea typeface="Calibri"/>
+                <a:cs typeface="Calibri"/>
+                <a:sym typeface="Calibri"/>
+              </a:rPr>
+              <a:t>2 min</a:t>
+            </a:r>
+            <a:endParaRPr/>
+          </a:p>
+        </p:txBody>
+      </p:sp>
+      <p:sp>
+        <p:nvSpPr>
+          <p:cNvPr id="108" name="Google Shape;108;p15"/>
+          <p:cNvSpPr/>
+          <p:nvPr/>
+        </p:nvSpPr>
+        <p:spPr>
+          <a:xfrm>
+            <a:off x="731520" y="3026664"/>
+            <a:ext cx="10515600" cy="658368"/>
+          </a:xfrm>
+          <a:prstGeom prst="roundRect">
+            <a:avLst>
+              <a:gd fmla="val 16667" name="adj"/>
+            </a:avLst>
+          </a:prstGeom>
+          <a:solidFill>
+            <a:srgbClr val="FFFFFF"/>
+          </a:solidFill>
+          <a:ln cap="flat" cmpd="sng" w="12700">
+            <a:solidFill>
+              <a:srgbClr val="DDDDDD"/>
+            </a:solidFill>
+            <a:prstDash val="solid"/>
+            <a:round/>
+            <a:headEnd len="sm" w="sm" type="none"/>
+            <a:tailEnd len="sm" w="sm" type="none"/>
+          </a:ln>
+        </p:spPr>
+        <p:txBody>
+          <a:bodyPr anchorCtr="0" anchor="ctr" bIns="45700" lIns="91425" spcFirstLastPara="1" rIns="91425" wrap="square" tIns="45700">
+            <a:noAutofit/>
+          </a:bodyPr>
+          <a:lstStyle/>
+          <a:p>
+            <a:pPr indent="0" lvl="0" marL="0" marR="0" rtl="0" algn="ctr">
+              <a:spcBef>
+                <a:spcPts val="0"/>
+              </a:spcBef>
+              <a:spcAft>
+                <a:spcPts val="0"/>
+              </a:spcAft>
+              <a:buNone/>
+            </a:pPr>
+            <a:r>
+              <a:t/>
+            </a:r>
+            <a:endParaRPr b="0" i="0" sz="1800" u="none" cap="none" strike="noStrike">
+              <a:solidFill>
+                <a:schemeClr val="dk1"/>
+              </a:solidFill>
+              <a:latin typeface="Calibri"/>
+              <a:ea typeface="Calibri"/>
+              <a:cs typeface="Calibri"/>
+              <a:sym typeface="Calibri"/>
+            </a:endParaRPr>
+          </a:p>
+        </p:txBody>
+      </p:sp>
+      <p:sp>
+        <p:nvSpPr>
+          <p:cNvPr id="109" name="Google Shape;109;p15"/>
+          <p:cNvSpPr/>
+          <p:nvPr/>
+        </p:nvSpPr>
+        <p:spPr>
+          <a:xfrm>
+            <a:off x="914400" y="3127248"/>
+            <a:ext cx="457200" cy="457200"/>
+          </a:xfrm>
+          <a:prstGeom prst="roundRect">
+            <a:avLst>
+              <a:gd fmla="val 16667" name="adj"/>
+            </a:avLst>
+          </a:prstGeom>
+          <a:solidFill>
+            <a:srgbClr val="115594"/>
+          </a:solidFill>
+          <a:ln>
+            <a:noFill/>
+          </a:ln>
+        </p:spPr>
+        <p:txBody>
+          <a:bodyPr anchorCtr="0" anchor="ctr" bIns="45700" lIns="91425" spcFirstLastPara="1" rIns="91425" wrap="square" tIns="45700">
+            <a:noAutofit/>
+          </a:bodyPr>
+          <a:lstStyle/>
+          <a:p>
+            <a:pPr indent="0" lvl="0" marL="0" marR="0" rtl="0" algn="ctr">
+              <a:spcBef>
+                <a:spcPts val="0"/>
+              </a:spcBef>
+              <a:spcAft>
+                <a:spcPts val="0"/>
+              </a:spcAft>
+              <a:buNone/>
+            </a:pPr>
+            <a:r>
+              <a:t/>
+            </a:r>
+            <a:endParaRPr b="0" i="0" sz="1800" u="none" cap="none" strike="noStrike">
+              <a:solidFill>
+                <a:schemeClr val="dk1"/>
+              </a:solidFill>
+              <a:latin typeface="Calibri"/>
+              <a:ea typeface="Calibri"/>
+              <a:cs typeface="Calibri"/>
+              <a:sym typeface="Calibri"/>
+            </a:endParaRPr>
+          </a:p>
+        </p:txBody>
+      </p:sp>
+      <p:sp>
+        <p:nvSpPr>
+          <p:cNvPr id="110" name="Google Shape;110;p15"/>
+          <p:cNvSpPr txBox="1"/>
+          <p:nvPr/>
+        </p:nvSpPr>
+        <p:spPr>
+          <a:xfrm>
+            <a:off x="914400" y="3127248"/>
+            <a:ext cx="457200" cy="457200"/>
+          </a:xfrm>
+          <a:prstGeom prst="rect">
+            <a:avLst/>
+          </a:prstGeom>
+          <a:noFill/>
+          <a:ln>
+            <a:noFill/>
+          </a:ln>
+        </p:spPr>
+        <p:txBody>
+          <a:bodyPr anchorCtr="0" anchor="t" bIns="45700" lIns="91425" spcFirstLastPara="1" rIns="91425" wrap="square" tIns="45700">
+            <a:spAutoFit/>
+          </a:bodyPr>
+          <a:lstStyle/>
+          <a:p>
+            <a:pPr indent="0" lvl="0" marL="0" marR="0" rtl="0" algn="ctr">
+              <a:spcBef>
+                <a:spcPts val="0"/>
+              </a:spcBef>
+              <a:spcAft>
+                <a:spcPts val="0"/>
+              </a:spcAft>
+              <a:buNone/>
+            </a:pPr>
+            <a:r>
+              <a:rPr b="1" i="0" lang="en-US" sz="1800" u="none" cap="none" strike="noStrike">
+                <a:solidFill>
+                  <a:srgbClr val="FFFFFF"/>
+                </a:solidFill>
+                <a:latin typeface="Calibri"/>
+                <a:ea typeface="Calibri"/>
+                <a:cs typeface="Calibri"/>
+                <a:sym typeface="Calibri"/>
+              </a:rPr>
+              <a:t>3</a:t>
+            </a:r>
+            <a:endParaRPr/>
+          </a:p>
+        </p:txBody>
+      </p:sp>
+      <p:sp>
+        <p:nvSpPr>
+          <p:cNvPr id="111" name="Google Shape;111;p15"/>
+          <p:cNvSpPr txBox="1"/>
+          <p:nvPr/>
+        </p:nvSpPr>
+        <p:spPr>
+          <a:xfrm>
+            <a:off x="1554480" y="3163824"/>
+            <a:ext cx="7315200" cy="384048"/>
+          </a:xfrm>
+          <a:prstGeom prst="rect">
+            <a:avLst/>
+          </a:prstGeom>
+          <a:noFill/>
+          <a:ln>
+            <a:noFill/>
+          </a:ln>
+        </p:spPr>
+        <p:txBody>
+          <a:bodyPr anchorCtr="0" anchor="t" bIns="45700" lIns="91425" spcFirstLastPara="1" rIns="91425" wrap="square" tIns="45700">
+            <a:spAutoFit/>
+          </a:bodyPr>
+          <a:lstStyle/>
+          <a:p>
+            <a:pPr indent="0" lvl="0" marL="0" marR="0" rtl="0" algn="l">
+              <a:spcBef>
+                <a:spcPts val="0"/>
+              </a:spcBef>
+              <a:spcAft>
+                <a:spcPts val="0"/>
+              </a:spcAft>
+              <a:buNone/>
+            </a:pPr>
+            <a:r>
+              <a:rPr b="1" i="0" lang="en-US" sz="1600" u="none" cap="none" strike="noStrike">
+                <a:solidFill>
+                  <a:srgbClr val="0E3A66"/>
+                </a:solidFill>
+                <a:latin typeface="Calibri"/>
+                <a:ea typeface="Calibri"/>
+                <a:cs typeface="Calibri"/>
+                <a:sym typeface="Calibri"/>
+              </a:rPr>
+              <a:t>Solution Architecture — 4+1 View Model</a:t>
+            </a:r>
+            <a:endParaRPr/>
+          </a:p>
+        </p:txBody>
+      </p:sp>
+      <p:sp>
+        <p:nvSpPr>
+          <p:cNvPr id="112" name="Google Shape;112;p15"/>
+          <p:cNvSpPr txBox="1"/>
+          <p:nvPr/>
+        </p:nvSpPr>
+        <p:spPr>
+          <a:xfrm>
+            <a:off x="9601200" y="3163824"/>
+            <a:ext cx="1371600" cy="384048"/>
+          </a:xfrm>
+          <a:prstGeom prst="rect">
+            <a:avLst/>
+          </a:prstGeom>
+          <a:noFill/>
+          <a:ln>
+            <a:noFill/>
+          </a:ln>
+        </p:spPr>
+        <p:txBody>
+          <a:bodyPr anchorCtr="0" anchor="t" bIns="45700" lIns="91425" spcFirstLastPara="1" rIns="91425" wrap="square" tIns="45700">
+            <a:spAutoFit/>
+          </a:bodyPr>
+          <a:lstStyle/>
+          <a:p>
+            <a:pPr indent="0" lvl="0" marL="0" marR="0" rtl="0" algn="r">
+              <a:spcBef>
+                <a:spcPts val="0"/>
+              </a:spcBef>
+              <a:spcAft>
+                <a:spcPts val="0"/>
+              </a:spcAft>
+              <a:buNone/>
+            </a:pPr>
+            <a:r>
+              <a:rPr b="0" i="0" lang="en-US" sz="1400" u="none" cap="none" strike="noStrike">
+                <a:solidFill>
+                  <a:srgbClr val="0F766E"/>
+                </a:solidFill>
+                <a:latin typeface="Calibri"/>
+                <a:ea typeface="Calibri"/>
+                <a:cs typeface="Calibri"/>
+                <a:sym typeface="Calibri"/>
+              </a:rPr>
+              <a:t>5 min</a:t>
+            </a:r>
+            <a:endParaRPr/>
+          </a:p>
+        </p:txBody>
+      </p:sp>
+      <p:sp>
+        <p:nvSpPr>
+          <p:cNvPr id="113" name="Google Shape;113;p15"/>
+          <p:cNvSpPr/>
+          <p:nvPr/>
+        </p:nvSpPr>
+        <p:spPr>
+          <a:xfrm>
+            <a:off x="731520" y="3831336"/>
+            <a:ext cx="10515600" cy="658368"/>
+          </a:xfrm>
+          <a:prstGeom prst="roundRect">
+            <a:avLst>
+              <a:gd fmla="val 16667" name="adj"/>
+            </a:avLst>
+          </a:prstGeom>
+          <a:solidFill>
+            <a:srgbClr val="FFFFFF"/>
+          </a:solidFill>
+          <a:ln cap="flat" cmpd="sng" w="12700">
+            <a:solidFill>
+              <a:srgbClr val="DDDDDD"/>
+            </a:solidFill>
+            <a:prstDash val="solid"/>
+            <a:round/>
+            <a:headEnd len="sm" w="sm" type="none"/>
+            <a:tailEnd len="sm" w="sm" type="none"/>
+          </a:ln>
+        </p:spPr>
+        <p:txBody>
+          <a:bodyPr anchorCtr="0" anchor="ctr" bIns="45700" lIns="91425" spcFirstLastPara="1" rIns="91425" wrap="square" tIns="45700">
+            <a:noAutofit/>
+          </a:bodyPr>
+          <a:lstStyle/>
+          <a:p>
+            <a:pPr indent="0" lvl="0" marL="0" marR="0" rtl="0" algn="ctr">
+              <a:spcBef>
+                <a:spcPts val="0"/>
+              </a:spcBef>
+              <a:spcAft>
+                <a:spcPts val="0"/>
+              </a:spcAft>
+              <a:buNone/>
+            </a:pPr>
+            <a:r>
+              <a:t/>
+            </a:r>
+            <a:endParaRPr b="0" i="0" sz="1800" u="none" cap="none" strike="noStrike">
+              <a:solidFill>
+                <a:schemeClr val="dk1"/>
+              </a:solidFill>
+              <a:latin typeface="Calibri"/>
+              <a:ea typeface="Calibri"/>
+              <a:cs typeface="Calibri"/>
+              <a:sym typeface="Calibri"/>
+            </a:endParaRPr>
+          </a:p>
+        </p:txBody>
+      </p:sp>
+      <p:sp>
+        <p:nvSpPr>
+          <p:cNvPr id="114" name="Google Shape;114;p15"/>
+          <p:cNvSpPr/>
+          <p:nvPr/>
+        </p:nvSpPr>
+        <p:spPr>
+          <a:xfrm>
+            <a:off x="914400" y="3931920"/>
+            <a:ext cx="457200" cy="457200"/>
+          </a:xfrm>
+          <a:prstGeom prst="roundRect">
+            <a:avLst>
+              <a:gd fmla="val 16667" name="adj"/>
+            </a:avLst>
+          </a:prstGeom>
+          <a:solidFill>
+            <a:srgbClr val="115594"/>
+          </a:solidFill>
+          <a:ln>
+            <a:noFill/>
+          </a:ln>
+        </p:spPr>
+        <p:txBody>
+          <a:bodyPr anchorCtr="0" anchor="ctr" bIns="45700" lIns="91425" spcFirstLastPara="1" rIns="91425" wrap="square" tIns="45700">
+            <a:noAutofit/>
+          </a:bodyPr>
+          <a:lstStyle/>
+          <a:p>
+            <a:pPr indent="0" lvl="0" marL="0" marR="0" rtl="0" algn="ctr">
+              <a:spcBef>
+                <a:spcPts val="0"/>
+              </a:spcBef>
+              <a:spcAft>
+                <a:spcPts val="0"/>
+              </a:spcAft>
+              <a:buNone/>
+            </a:pPr>
+            <a:r>
+              <a:t/>
+            </a:r>
+            <a:endParaRPr b="0" i="0" sz="1800" u="none" cap="none" strike="noStrike">
+              <a:solidFill>
+                <a:schemeClr val="dk1"/>
+              </a:solidFill>
+              <a:latin typeface="Calibri"/>
+              <a:ea typeface="Calibri"/>
+              <a:cs typeface="Calibri"/>
+              <a:sym typeface="Calibri"/>
+            </a:endParaRPr>
+          </a:p>
+        </p:txBody>
+      </p:sp>
+      <p:sp>
+        <p:nvSpPr>
+          <p:cNvPr id="115" name="Google Shape;115;p15"/>
+          <p:cNvSpPr txBox="1"/>
+          <p:nvPr/>
+        </p:nvSpPr>
+        <p:spPr>
+          <a:xfrm>
+            <a:off x="914400" y="3931920"/>
+            <a:ext cx="457200" cy="457200"/>
+          </a:xfrm>
+          <a:prstGeom prst="rect">
+            <a:avLst/>
+          </a:prstGeom>
+          <a:noFill/>
+          <a:ln>
+            <a:noFill/>
+          </a:ln>
+        </p:spPr>
+        <p:txBody>
+          <a:bodyPr anchorCtr="0" anchor="t" bIns="45700" lIns="91425" spcFirstLastPara="1" rIns="91425" wrap="square" tIns="45700">
+            <a:spAutoFit/>
+          </a:bodyPr>
+          <a:lstStyle/>
+          <a:p>
+            <a:pPr indent="0" lvl="0" marL="0" marR="0" rtl="0" algn="ctr">
+              <a:spcBef>
+                <a:spcPts val="0"/>
+              </a:spcBef>
+              <a:spcAft>
+                <a:spcPts val="0"/>
+              </a:spcAft>
+              <a:buNone/>
+            </a:pPr>
+            <a:r>
+              <a:rPr b="1" i="0" lang="en-US" sz="1800" u="none" cap="none" strike="noStrike">
+                <a:solidFill>
+                  <a:srgbClr val="FFFFFF"/>
+                </a:solidFill>
+                <a:latin typeface="Calibri"/>
+                <a:ea typeface="Calibri"/>
+                <a:cs typeface="Calibri"/>
+                <a:sym typeface="Calibri"/>
+              </a:rPr>
+              <a:t>4</a:t>
+            </a:r>
+            <a:endParaRPr/>
+          </a:p>
+        </p:txBody>
+      </p:sp>
+      <p:sp>
+        <p:nvSpPr>
+          <p:cNvPr id="116" name="Google Shape;116;p15"/>
+          <p:cNvSpPr txBox="1"/>
+          <p:nvPr/>
+        </p:nvSpPr>
+        <p:spPr>
+          <a:xfrm>
+            <a:off x="1554480" y="3968496"/>
+            <a:ext cx="7315200" cy="384048"/>
+          </a:xfrm>
+          <a:prstGeom prst="rect">
+            <a:avLst/>
+          </a:prstGeom>
+          <a:noFill/>
+          <a:ln>
+            <a:noFill/>
+          </a:ln>
+        </p:spPr>
+        <p:txBody>
+          <a:bodyPr anchorCtr="0" anchor="t" bIns="45700" lIns="91425" spcFirstLastPara="1" rIns="91425" wrap="square" tIns="45700">
+            <a:spAutoFit/>
+          </a:bodyPr>
+          <a:lstStyle/>
+          <a:p>
+            <a:pPr indent="0" lvl="0" marL="0" marR="0" rtl="0" algn="l">
+              <a:spcBef>
+                <a:spcPts val="0"/>
+              </a:spcBef>
+              <a:spcAft>
+                <a:spcPts val="0"/>
+              </a:spcAft>
+              <a:buNone/>
+            </a:pPr>
+            <a:r>
+              <a:rPr b="1" i="0" lang="en-US" sz="1600" u="none" cap="none" strike="noStrike">
+                <a:solidFill>
+                  <a:srgbClr val="0E3A66"/>
+                </a:solidFill>
+                <a:latin typeface="Calibri"/>
+                <a:ea typeface="Calibri"/>
+                <a:cs typeface="Calibri"/>
+                <a:sym typeface="Calibri"/>
+              </a:rPr>
+              <a:t>Solution Benefits</a:t>
+            </a:r>
+            <a:endParaRPr/>
+          </a:p>
+        </p:txBody>
+      </p:sp>
+      <p:sp>
+        <p:nvSpPr>
+          <p:cNvPr id="117" name="Google Shape;117;p15"/>
+          <p:cNvSpPr txBox="1"/>
+          <p:nvPr/>
+        </p:nvSpPr>
+        <p:spPr>
+          <a:xfrm>
+            <a:off x="9601200" y="3968496"/>
+            <a:ext cx="1371600" cy="384048"/>
+          </a:xfrm>
+          <a:prstGeom prst="rect">
+            <a:avLst/>
+          </a:prstGeom>
+          <a:noFill/>
+          <a:ln>
+            <a:noFill/>
+          </a:ln>
+        </p:spPr>
+        <p:txBody>
+          <a:bodyPr anchorCtr="0" anchor="t" bIns="45700" lIns="91425" spcFirstLastPara="1" rIns="91425" wrap="square" tIns="45700">
+            <a:spAutoFit/>
+          </a:bodyPr>
+          <a:lstStyle/>
+          <a:p>
+            <a:pPr indent="0" lvl="0" marL="0" marR="0" rtl="0" algn="r">
+              <a:spcBef>
+                <a:spcPts val="0"/>
+              </a:spcBef>
+              <a:spcAft>
+                <a:spcPts val="0"/>
+              </a:spcAft>
+              <a:buNone/>
+            </a:pPr>
+            <a:r>
+              <a:rPr b="0" i="0" lang="en-US" sz="1400" u="none" cap="none" strike="noStrike">
+                <a:solidFill>
+                  <a:srgbClr val="0F766E"/>
+                </a:solidFill>
+                <a:latin typeface="Calibri"/>
+                <a:ea typeface="Calibri"/>
+                <a:cs typeface="Calibri"/>
+                <a:sym typeface="Calibri"/>
+              </a:rPr>
+              <a:t>2 min</a:t>
+            </a:r>
+            <a:endParaRPr/>
+          </a:p>
+        </p:txBody>
+      </p:sp>
+      <p:sp>
+        <p:nvSpPr>
+          <p:cNvPr id="118" name="Google Shape;118;p15"/>
+          <p:cNvSpPr/>
+          <p:nvPr/>
+        </p:nvSpPr>
+        <p:spPr>
+          <a:xfrm>
+            <a:off x="731520" y="4636008"/>
+            <a:ext cx="10515600" cy="658368"/>
+          </a:xfrm>
+          <a:prstGeom prst="roundRect">
+            <a:avLst>
+              <a:gd fmla="val 16667" name="adj"/>
+            </a:avLst>
+          </a:prstGeom>
+          <a:solidFill>
+            <a:srgbClr val="FFFFFF"/>
+          </a:solidFill>
+          <a:ln cap="flat" cmpd="sng" w="12700">
+            <a:solidFill>
+              <a:srgbClr val="DDDDDD"/>
+            </a:solidFill>
+            <a:prstDash val="solid"/>
+            <a:round/>
+            <a:headEnd len="sm" w="sm" type="none"/>
+            <a:tailEnd len="sm" w="sm" type="none"/>
+          </a:ln>
+        </p:spPr>
+        <p:txBody>
+          <a:bodyPr anchorCtr="0" anchor="ctr" bIns="45700" lIns="91425" spcFirstLastPara="1" rIns="91425" wrap="square" tIns="45700">
+            <a:noAutofit/>
+          </a:bodyPr>
+          <a:lstStyle/>
+          <a:p>
+            <a:pPr indent="0" lvl="0" marL="0" marR="0" rtl="0" algn="ctr">
+              <a:spcBef>
+                <a:spcPts val="0"/>
+              </a:spcBef>
+              <a:spcAft>
+                <a:spcPts val="0"/>
+              </a:spcAft>
+              <a:buNone/>
+            </a:pPr>
+            <a:r>
+              <a:t/>
+            </a:r>
+            <a:endParaRPr b="0" i="0" sz="1800" u="none" cap="none" strike="noStrike">
+              <a:solidFill>
+                <a:schemeClr val="dk1"/>
+              </a:solidFill>
+              <a:latin typeface="Calibri"/>
+              <a:ea typeface="Calibri"/>
+              <a:cs typeface="Calibri"/>
+              <a:sym typeface="Calibri"/>
+            </a:endParaRPr>
+          </a:p>
+        </p:txBody>
+      </p:sp>
+      <p:sp>
+        <p:nvSpPr>
+          <p:cNvPr id="119" name="Google Shape;119;p15"/>
+          <p:cNvSpPr/>
+          <p:nvPr/>
+        </p:nvSpPr>
+        <p:spPr>
+          <a:xfrm>
+            <a:off x="914400" y="4736592"/>
+            <a:ext cx="457200" cy="457200"/>
+          </a:xfrm>
+          <a:prstGeom prst="roundRect">
+            <a:avLst>
+              <a:gd fmla="val 16667" name="adj"/>
+            </a:avLst>
+          </a:prstGeom>
+          <a:solidFill>
+            <a:srgbClr val="115594"/>
+          </a:solidFill>
+          <a:ln>
+            <a:noFill/>
+          </a:ln>
+        </p:spPr>
+        <p:txBody>
+          <a:bodyPr anchorCtr="0" anchor="ctr" bIns="45700" lIns="91425" spcFirstLastPara="1" rIns="91425" wrap="square" tIns="45700">
+            <a:noAutofit/>
+          </a:bodyPr>
+          <a:lstStyle/>
+          <a:p>
+            <a:pPr indent="0" lvl="0" marL="0" marR="0" rtl="0" algn="ctr">
+              <a:spcBef>
+                <a:spcPts val="0"/>
+              </a:spcBef>
+              <a:spcAft>
+                <a:spcPts val="0"/>
+              </a:spcAft>
+              <a:buNone/>
+            </a:pPr>
+            <a:r>
+              <a:t/>
+            </a:r>
+            <a:endParaRPr b="0" i="0" sz="1800" u="none" cap="none" strike="noStrike">
+              <a:solidFill>
+                <a:schemeClr val="dk1"/>
+              </a:solidFill>
+              <a:latin typeface="Calibri"/>
+              <a:ea typeface="Calibri"/>
+              <a:cs typeface="Calibri"/>
+              <a:sym typeface="Calibri"/>
+            </a:endParaRPr>
+          </a:p>
+        </p:txBody>
+      </p:sp>
+      <p:sp>
+        <p:nvSpPr>
+          <p:cNvPr id="120" name="Google Shape;120;p15"/>
+          <p:cNvSpPr txBox="1"/>
+          <p:nvPr/>
+        </p:nvSpPr>
+        <p:spPr>
+          <a:xfrm>
+            <a:off x="914400" y="4736592"/>
+            <a:ext cx="457200" cy="457200"/>
+          </a:xfrm>
+          <a:prstGeom prst="rect">
+            <a:avLst/>
+          </a:prstGeom>
+          <a:noFill/>
+          <a:ln>
+            <a:noFill/>
+          </a:ln>
+        </p:spPr>
+        <p:txBody>
+          <a:bodyPr anchorCtr="0" anchor="t" bIns="45700" lIns="91425" spcFirstLastPara="1" rIns="91425" wrap="square" tIns="45700">
+            <a:spAutoFit/>
+          </a:bodyPr>
+          <a:lstStyle/>
+          <a:p>
+            <a:pPr indent="0" lvl="0" marL="0" marR="0" rtl="0" algn="ctr">
+              <a:spcBef>
+                <a:spcPts val="0"/>
+              </a:spcBef>
+              <a:spcAft>
+                <a:spcPts val="0"/>
+              </a:spcAft>
+              <a:buNone/>
+            </a:pPr>
+            <a:r>
+              <a:rPr b="1" i="0" lang="en-US" sz="1800" u="none" cap="none" strike="noStrike">
+                <a:solidFill>
+                  <a:srgbClr val="FFFFFF"/>
+                </a:solidFill>
+                <a:latin typeface="Calibri"/>
+                <a:ea typeface="Calibri"/>
+                <a:cs typeface="Calibri"/>
+                <a:sym typeface="Calibri"/>
+              </a:rPr>
+              <a:t>5</a:t>
+            </a:r>
+            <a:endParaRPr/>
+          </a:p>
+        </p:txBody>
+      </p:sp>
+      <p:sp>
+        <p:nvSpPr>
+          <p:cNvPr id="121" name="Google Shape;121;p15"/>
+          <p:cNvSpPr txBox="1"/>
+          <p:nvPr/>
+        </p:nvSpPr>
+        <p:spPr>
+          <a:xfrm>
+            <a:off x="1554480" y="4773168"/>
+            <a:ext cx="7315200" cy="338700"/>
+          </a:xfrm>
+          <a:prstGeom prst="rect">
+            <a:avLst/>
+          </a:prstGeom>
+          <a:noFill/>
+          <a:ln>
+            <a:noFill/>
+          </a:ln>
+        </p:spPr>
+        <p:txBody>
+          <a:bodyPr anchorCtr="0" anchor="t" bIns="45700" lIns="91425" spcFirstLastPara="1" rIns="91425" wrap="square" tIns="45700">
+            <a:spAutoFit/>
+          </a:bodyPr>
+          <a:lstStyle/>
+          <a:p>
+            <a:pPr indent="0" lvl="0" marL="0" marR="0" rtl="0" algn="l">
+              <a:spcBef>
+                <a:spcPts val="0"/>
+              </a:spcBef>
+              <a:spcAft>
+                <a:spcPts val="0"/>
+              </a:spcAft>
+              <a:buNone/>
+            </a:pPr>
+            <a:r>
+              <a:rPr b="1" i="0" lang="en-US" sz="1600" u="none" cap="none" strike="noStrike">
+                <a:solidFill>
+                  <a:srgbClr val="0E3A66"/>
+                </a:solidFill>
+                <a:latin typeface="Calibri"/>
+                <a:ea typeface="Calibri"/>
+                <a:cs typeface="Calibri"/>
+                <a:sym typeface="Calibri"/>
+              </a:rPr>
+              <a:t>Estimation: Development Effort &amp; Infrastructure Cost</a:t>
+            </a:r>
+            <a:endParaRPr/>
+          </a:p>
+        </p:txBody>
+      </p:sp>
+      <p:sp>
+        <p:nvSpPr>
+          <p:cNvPr id="122" name="Google Shape;122;p15"/>
+          <p:cNvSpPr txBox="1"/>
+          <p:nvPr/>
+        </p:nvSpPr>
+        <p:spPr>
+          <a:xfrm>
+            <a:off x="9601200" y="4773168"/>
+            <a:ext cx="1371600" cy="384048"/>
+          </a:xfrm>
+          <a:prstGeom prst="rect">
+            <a:avLst/>
+          </a:prstGeom>
+          <a:noFill/>
+          <a:ln>
+            <a:noFill/>
+          </a:ln>
+        </p:spPr>
+        <p:txBody>
+          <a:bodyPr anchorCtr="0" anchor="t" bIns="45700" lIns="91425" spcFirstLastPara="1" rIns="91425" wrap="square" tIns="45700">
+            <a:spAutoFit/>
+          </a:bodyPr>
+          <a:lstStyle/>
+          <a:p>
+            <a:pPr indent="0" lvl="0" marL="0" marR="0" rtl="0" algn="r">
+              <a:spcBef>
+                <a:spcPts val="0"/>
+              </a:spcBef>
+              <a:spcAft>
+                <a:spcPts val="0"/>
+              </a:spcAft>
+              <a:buNone/>
+            </a:pPr>
+            <a:r>
+              <a:rPr b="0" i="0" lang="en-US" sz="1400" u="none" cap="none" strike="noStrike">
+                <a:solidFill>
+                  <a:srgbClr val="0F766E"/>
+                </a:solidFill>
+                <a:latin typeface="Calibri"/>
+                <a:ea typeface="Calibri"/>
+                <a:cs typeface="Calibri"/>
+                <a:sym typeface="Calibri"/>
+              </a:rPr>
+              <a:t>2 min</a:t>
+            </a:r>
+            <a:endParaRPr/>
+          </a:p>
+        </p:txBody>
+      </p:sp>
+      <p:sp>
+        <p:nvSpPr>
+          <p:cNvPr id="123" name="Google Shape;123;p15"/>
+          <p:cNvSpPr/>
+          <p:nvPr/>
+        </p:nvSpPr>
+        <p:spPr>
+          <a:xfrm>
+            <a:off x="731520" y="5440680"/>
+            <a:ext cx="10515600" cy="658368"/>
+          </a:xfrm>
+          <a:prstGeom prst="roundRect">
+            <a:avLst>
+              <a:gd fmla="val 16667" name="adj"/>
+            </a:avLst>
+          </a:prstGeom>
+          <a:solidFill>
+            <a:srgbClr val="FFFFFF"/>
+          </a:solidFill>
+          <a:ln cap="flat" cmpd="sng" w="12700">
+            <a:solidFill>
+              <a:srgbClr val="DDDDDD"/>
+            </a:solidFill>
+            <a:prstDash val="solid"/>
+            <a:round/>
+            <a:headEnd len="sm" w="sm" type="none"/>
+            <a:tailEnd len="sm" w="sm" type="none"/>
+          </a:ln>
+        </p:spPr>
+        <p:txBody>
+          <a:bodyPr anchorCtr="0" anchor="ctr" bIns="45700" lIns="91425" spcFirstLastPara="1" rIns="91425" wrap="square" tIns="45700">
+            <a:noAutofit/>
+          </a:bodyPr>
+          <a:lstStyle/>
+          <a:p>
+            <a:pPr indent="0" lvl="0" marL="0" marR="0" rtl="0" algn="ctr">
+              <a:spcBef>
+                <a:spcPts val="0"/>
+              </a:spcBef>
+              <a:spcAft>
+                <a:spcPts val="0"/>
+              </a:spcAft>
+              <a:buNone/>
+            </a:pPr>
+            <a:r>
+              <a:t/>
+            </a:r>
+            <a:endParaRPr b="0" i="0" sz="1800" u="none" cap="none" strike="noStrike">
+              <a:solidFill>
+                <a:schemeClr val="dk1"/>
+              </a:solidFill>
+              <a:latin typeface="Calibri"/>
+              <a:ea typeface="Calibri"/>
+              <a:cs typeface="Calibri"/>
+              <a:sym typeface="Calibri"/>
+            </a:endParaRPr>
+          </a:p>
+        </p:txBody>
+      </p:sp>
+      <p:sp>
+        <p:nvSpPr>
+          <p:cNvPr id="124" name="Google Shape;124;p15"/>
+          <p:cNvSpPr/>
+          <p:nvPr/>
+        </p:nvSpPr>
+        <p:spPr>
+          <a:xfrm>
+            <a:off x="914400" y="5541264"/>
+            <a:ext cx="457200" cy="457200"/>
+          </a:xfrm>
+          <a:prstGeom prst="roundRect">
+            <a:avLst>
+              <a:gd fmla="val 16667" name="adj"/>
+            </a:avLst>
+          </a:prstGeom>
+          <a:solidFill>
+            <a:srgbClr val="115594"/>
+          </a:solidFill>
+          <a:ln>
+            <a:noFill/>
+          </a:ln>
+        </p:spPr>
+        <p:txBody>
+          <a:bodyPr anchorCtr="0" anchor="ctr" bIns="45700" lIns="91425" spcFirstLastPara="1" rIns="91425" wrap="square" tIns="45700">
+            <a:noAutofit/>
+          </a:bodyPr>
+          <a:lstStyle/>
+          <a:p>
+            <a:pPr indent="0" lvl="0" marL="0" marR="0" rtl="0" algn="ctr">
+              <a:spcBef>
+                <a:spcPts val="0"/>
+              </a:spcBef>
+              <a:spcAft>
+                <a:spcPts val="0"/>
+              </a:spcAft>
+              <a:buNone/>
+            </a:pPr>
+            <a:r>
+              <a:t/>
+            </a:r>
+            <a:endParaRPr b="0" i="0" sz="1800" u="none" cap="none" strike="noStrike">
+              <a:solidFill>
+                <a:schemeClr val="dk1"/>
+              </a:solidFill>
+              <a:latin typeface="Calibri"/>
+              <a:ea typeface="Calibri"/>
+              <a:cs typeface="Calibri"/>
+              <a:sym typeface="Calibri"/>
+            </a:endParaRPr>
+          </a:p>
+        </p:txBody>
+      </p:sp>
+      <p:sp>
+        <p:nvSpPr>
+          <p:cNvPr id="125" name="Google Shape;125;p15"/>
+          <p:cNvSpPr txBox="1"/>
+          <p:nvPr/>
+        </p:nvSpPr>
+        <p:spPr>
+          <a:xfrm>
+            <a:off x="914400" y="5541264"/>
+            <a:ext cx="457200" cy="457200"/>
+          </a:xfrm>
+          <a:prstGeom prst="rect">
+            <a:avLst/>
+          </a:prstGeom>
+          <a:noFill/>
+          <a:ln>
+            <a:noFill/>
+          </a:ln>
+        </p:spPr>
+        <p:txBody>
+          <a:bodyPr anchorCtr="0" anchor="t" bIns="45700" lIns="91425" spcFirstLastPara="1" rIns="91425" wrap="square" tIns="45700">
+            <a:spAutoFit/>
+          </a:bodyPr>
+          <a:lstStyle/>
+          <a:p>
+            <a:pPr indent="0" lvl="0" marL="0" marR="0" rtl="0" algn="ctr">
+              <a:spcBef>
+                <a:spcPts val="0"/>
+              </a:spcBef>
+              <a:spcAft>
+                <a:spcPts val="0"/>
+              </a:spcAft>
+              <a:buNone/>
+            </a:pPr>
+            <a:r>
+              <a:rPr b="1" i="0" lang="en-US" sz="1800" u="none" cap="none" strike="noStrike">
+                <a:solidFill>
+                  <a:srgbClr val="FFFFFF"/>
+                </a:solidFill>
+                <a:latin typeface="Calibri"/>
+                <a:ea typeface="Calibri"/>
+                <a:cs typeface="Calibri"/>
+                <a:sym typeface="Calibri"/>
+              </a:rPr>
+              <a:t>6</a:t>
+            </a:r>
+            <a:endParaRPr/>
+          </a:p>
+        </p:txBody>
+      </p:sp>
+      <p:sp>
+        <p:nvSpPr>
+          <p:cNvPr id="126" name="Google Shape;126;p15"/>
+          <p:cNvSpPr txBox="1"/>
+          <p:nvPr/>
+        </p:nvSpPr>
+        <p:spPr>
+          <a:xfrm>
+            <a:off x="1554480" y="5577840"/>
+            <a:ext cx="7315200" cy="384048"/>
+          </a:xfrm>
+          <a:prstGeom prst="rect">
+            <a:avLst/>
+          </a:prstGeom>
+          <a:noFill/>
+          <a:ln>
+            <a:noFill/>
+          </a:ln>
+        </p:spPr>
+        <p:txBody>
+          <a:bodyPr anchorCtr="0" anchor="t" bIns="45700" lIns="91425" spcFirstLastPara="1" rIns="91425" wrap="square" tIns="45700">
+            <a:spAutoFit/>
+          </a:bodyPr>
+          <a:lstStyle/>
+          <a:p>
+            <a:pPr indent="0" lvl="0" marL="0" marR="0" rtl="0" algn="l">
+              <a:spcBef>
+                <a:spcPts val="0"/>
+              </a:spcBef>
+              <a:spcAft>
+                <a:spcPts val="0"/>
+              </a:spcAft>
+              <a:buNone/>
+            </a:pPr>
+            <a:r>
+              <a:rPr b="1" i="0" lang="en-US" sz="1600" u="none" cap="none" strike="noStrike">
+                <a:solidFill>
+                  <a:srgbClr val="0E3A66"/>
+                </a:solidFill>
+                <a:latin typeface="Calibri"/>
+                <a:ea typeface="Calibri"/>
+                <a:cs typeface="Calibri"/>
+                <a:sym typeface="Calibri"/>
+              </a:rPr>
+              <a:t>Q&amp;A</a:t>
+            </a:r>
+            <a:endParaRPr/>
+          </a:p>
+        </p:txBody>
+      </p:sp>
+      <p:sp>
+        <p:nvSpPr>
+          <p:cNvPr id="127" name="Google Shape;127;p15"/>
+          <p:cNvSpPr txBox="1"/>
+          <p:nvPr/>
+        </p:nvSpPr>
+        <p:spPr>
+          <a:xfrm>
+            <a:off x="9601200" y="5577840"/>
+            <a:ext cx="1371600" cy="384048"/>
+          </a:xfrm>
+          <a:prstGeom prst="rect">
+            <a:avLst/>
+          </a:prstGeom>
+          <a:noFill/>
+          <a:ln>
+            <a:noFill/>
+          </a:ln>
+        </p:spPr>
+        <p:txBody>
+          <a:bodyPr anchorCtr="0" anchor="t" bIns="45700" lIns="91425" spcFirstLastPara="1" rIns="91425" wrap="square" tIns="45700">
+            <a:spAutoFit/>
+          </a:bodyPr>
+          <a:lstStyle/>
+          <a:p>
+            <a:pPr indent="0" lvl="0" marL="0" marR="0" rtl="0" algn="r">
+              <a:spcBef>
+                <a:spcPts val="0"/>
+              </a:spcBef>
+              <a:spcAft>
+                <a:spcPts val="0"/>
+              </a:spcAft>
+              <a:buNone/>
+            </a:pPr>
+            <a:r>
+              <a:rPr b="0" i="0" lang="en-US" sz="1400" u="none" cap="none" strike="noStrike">
+                <a:solidFill>
+                  <a:srgbClr val="0F766E"/>
+                </a:solidFill>
+                <a:latin typeface="Calibri"/>
+                <a:ea typeface="Calibri"/>
+                <a:cs typeface="Calibri"/>
+                <a:sym typeface="Calibri"/>
+              </a:rPr>
+              <a:t>15 min</a:t>
+            </a:r>
+            <a:endParaRPr/>
+          </a:p>
+        </p:txBody>
+      </p:sp>
     </p:spTree>
   </p:cSld>
   <p:clrMapOvr>
@@ -39468,7 +41086,7 @@
   <p:cSld>
     <p:spTree>
       <p:nvGrpSpPr>
-        <p:cNvPr id="103" name="Shape 103"/>
+        <p:cNvPr id="131" name="Shape 131"/>
         <p:cNvGrpSpPr/>
         <p:nvPr/>
       </p:nvGrpSpPr>
@@ -39482,7 +41100,7 @@
       </p:grpSpPr>
       <p:sp>
         <p:nvSpPr>
-          <p:cNvPr id="104" name="Google Shape;104;p16"/>
+          <p:cNvPr id="132" name="Google Shape;132;p16"/>
           <p:cNvSpPr/>
           <p:nvPr/>
         </p:nvSpPr>
@@ -39535,7 +41153,7 @@
       </p:sp>
       <p:sp>
         <p:nvSpPr>
-          <p:cNvPr id="105" name="Google Shape;105;p16"/>
+          <p:cNvPr id="133" name="Google Shape;133;p16"/>
           <p:cNvSpPr txBox="1"/>
           <p:nvPr/>
         </p:nvSpPr>
@@ -39577,7 +41195,7 @@
                 <a:cs typeface="Calibri"/>
                 <a:sym typeface="Calibri"/>
               </a:rPr>
-              <a:t>Agenda</a:t>
+              <a:t>Problem Statement</a:t>
             </a:r>
             <a:endParaRPr/>
           </a:p>
@@ -39585,7 +41203,57 @@
       </p:sp>
       <p:sp>
         <p:nvSpPr>
-          <p:cNvPr id="106" name="Google Shape;106;p16"/>
+          <p:cNvPr id="134" name="Google Shape;134;p16"/>
+          <p:cNvSpPr txBox="1"/>
+          <p:nvPr/>
+        </p:nvSpPr>
+        <p:spPr>
+          <a:xfrm>
+            <a:off x="548640" y="640080"/>
+            <a:ext cx="10972800" cy="369300"/>
+          </a:xfrm>
+          <a:prstGeom prst="rect">
+            <a:avLst/>
+          </a:prstGeom>
+          <a:noFill/>
+          <a:ln>
+            <a:noFill/>
+          </a:ln>
+        </p:spPr>
+        <p:txBody>
+          <a:bodyPr anchorCtr="0" anchor="t" bIns="45700" lIns="91425" spcFirstLastPara="1" rIns="91425" wrap="square" tIns="45700">
+            <a:spAutoFit/>
+          </a:bodyPr>
+          <a:lstStyle/>
+          <a:p>
+            <a:pPr indent="0" lvl="0" marL="0" marR="0" rtl="0" algn="l">
+              <a:spcBef>
+                <a:spcPts val="0"/>
+              </a:spcBef>
+              <a:spcAft>
+                <a:spcPts val="0"/>
+              </a:spcAft>
+              <a:buNone/>
+            </a:pPr>
+            <a:r>
+              <a:rPr b="0" i="0" lang="en-US" sz="1800" u="none" cap="none" strike="noStrike">
+                <a:solidFill>
+                  <a:srgbClr val="BBCCDD"/>
+                </a:solidFill>
+                <a:latin typeface="Calibri"/>
+                <a:ea typeface="Calibri"/>
+                <a:cs typeface="Calibri"/>
+                <a:sym typeface="Calibri"/>
+              </a:rPr>
+              <a:t>What challenges does the customer face today?</a:t>
+            </a:r>
+            <a:endParaRPr sz="1800"/>
+          </a:p>
+        </p:txBody>
+      </p:sp>
+      <p:sp>
+        <p:nvSpPr>
+          <p:cNvPr id="135" name="Google Shape;135;p16"/>
           <p:cNvSpPr/>
           <p:nvPr/>
         </p:nvSpPr>
@@ -39636,128 +41304,24 @@
           </a:p>
         </p:txBody>
       </p:sp>
-      <p:sp>
-        <p:nvSpPr>
-          <p:cNvPr id="107" name="Google Shape;107;p16"/>
-          <p:cNvSpPr/>
-          <p:nvPr/>
-        </p:nvSpPr>
-        <p:spPr>
-          <a:xfrm>
-            <a:off x="731520" y="1417320"/>
-            <a:ext cx="10515600" cy="658368"/>
-          </a:xfrm>
-          <a:prstGeom prst="roundRect">
-            <a:avLst>
-              <a:gd fmla="val 16667" name="adj"/>
-            </a:avLst>
-          </a:prstGeom>
-          <a:solidFill>
-            <a:srgbClr val="FFFFFF"/>
-          </a:solidFill>
-          <a:ln cap="flat" cmpd="sng" w="12700">
-            <a:solidFill>
-              <a:srgbClr val="DDDDDD"/>
-            </a:solidFill>
-            <a:prstDash val="solid"/>
-            <a:round/>
-            <a:headEnd len="sm" w="sm" type="none"/>
-            <a:tailEnd len="sm" w="sm" type="none"/>
-          </a:ln>
-        </p:spPr>
-        <p:txBody>
-          <a:bodyPr anchorCtr="0" anchor="ctr" bIns="45700" lIns="91425" spcFirstLastPara="1" rIns="91425" wrap="square" tIns="45700">
-            <a:noAutofit/>
-          </a:bodyPr>
-          <a:lstStyle/>
-          <a:p>
-            <a:pPr indent="0" lvl="0" marL="0" marR="0" rtl="0" algn="ctr">
-              <a:spcBef>
-                <a:spcPts val="0"/>
-              </a:spcBef>
-              <a:spcAft>
-                <a:spcPts val="0"/>
-              </a:spcAft>
-              <a:buNone/>
-            </a:pPr>
-            <a:r>
-              <a:t/>
-            </a:r>
-            <a:endParaRPr b="0" i="0" sz="1800" u="none" cap="none" strike="noStrike">
-              <a:solidFill>
-                <a:schemeClr val="dk1"/>
-              </a:solidFill>
-              <a:latin typeface="Calibri"/>
-              <a:ea typeface="Calibri"/>
-              <a:cs typeface="Calibri"/>
-              <a:sym typeface="Calibri"/>
-            </a:endParaRPr>
-          </a:p>
-        </p:txBody>
-      </p:sp>
-      <p:sp>
-        <p:nvSpPr>
-          <p:cNvPr id="108" name="Google Shape;108;p16"/>
-          <p:cNvSpPr/>
-          <p:nvPr/>
-        </p:nvSpPr>
-        <p:spPr>
-          <a:xfrm>
-            <a:off x="914400" y="1517904"/>
-            <a:ext cx="457200" cy="457200"/>
-          </a:xfrm>
-          <a:prstGeom prst="roundRect">
-            <a:avLst>
-              <a:gd fmla="val 16667" name="adj"/>
-            </a:avLst>
-          </a:prstGeom>
-          <a:solidFill>
-            <a:srgbClr val="115594"/>
-          </a:solidFill>
-          <a:ln>
-            <a:noFill/>
-          </a:ln>
-        </p:spPr>
-        <p:txBody>
-          <a:bodyPr anchorCtr="0" anchor="ctr" bIns="45700" lIns="91425" spcFirstLastPara="1" rIns="91425" wrap="square" tIns="45700">
-            <a:noAutofit/>
-          </a:bodyPr>
-          <a:lstStyle/>
-          <a:p>
-            <a:pPr indent="0" lvl="0" marL="0" marR="0" rtl="0" algn="ctr">
-              <a:spcBef>
-                <a:spcPts val="0"/>
-              </a:spcBef>
-              <a:spcAft>
-                <a:spcPts val="0"/>
-              </a:spcAft>
-              <a:buNone/>
-            </a:pPr>
-            <a:r>
-              <a:t/>
-            </a:r>
-            <a:endParaRPr b="0" i="0" sz="1800" u="none" cap="none" strike="noStrike">
-              <a:solidFill>
-                <a:schemeClr val="dk1"/>
-              </a:solidFill>
-              <a:latin typeface="Calibri"/>
-              <a:ea typeface="Calibri"/>
-              <a:cs typeface="Calibri"/>
-              <a:sym typeface="Calibri"/>
-            </a:endParaRPr>
-          </a:p>
-        </p:txBody>
-      </p:sp>
-      <p:sp>
-        <p:nvSpPr>
-          <p:cNvPr id="109" name="Google Shape;109;p16"/>
-          <p:cNvSpPr txBox="1"/>
-          <p:nvPr/>
-        </p:nvSpPr>
-        <p:spPr>
-          <a:xfrm>
-            <a:off x="914400" y="1517904"/>
-            <a:ext cx="457200" cy="457200"/>
+      <p:pic>
+        <p:nvPicPr>
+          <p:cNvPr id="136" name="Google Shape;136;p16"/>
+          <p:cNvPicPr preferRelativeResize="0"/>
+          <p:nvPr/>
+        </p:nvPicPr>
+        <p:blipFill>
+          <a:blip r:embed="rId3">
+            <a:alphaModFix/>
+          </a:blip>
+          <a:stretch>
+            <a:fillRect/>
+          </a:stretch>
+        </p:blipFill>
+        <p:spPr>
+          <a:xfrm>
+            <a:off x="2411266" y="1254760"/>
+            <a:ext cx="6961085" cy="5450840"/>
           </a:xfrm>
           <a:prstGeom prst="rect">
             <a:avLst/>
@@ -39767,1447 +41331,7 @@
             <a:noFill/>
           </a:ln>
         </p:spPr>
-        <p:txBody>
-          <a:bodyPr anchorCtr="0" anchor="t" bIns="45700" lIns="91425" spcFirstLastPara="1" rIns="91425" wrap="square" tIns="45700">
-            <a:spAutoFit/>
-          </a:bodyPr>
-          <a:lstStyle/>
-          <a:p>
-            <a:pPr indent="0" lvl="0" marL="0" marR="0" rtl="0" algn="ctr">
-              <a:spcBef>
-                <a:spcPts val="0"/>
-              </a:spcBef>
-              <a:spcAft>
-                <a:spcPts val="0"/>
-              </a:spcAft>
-              <a:buNone/>
-            </a:pPr>
-            <a:r>
-              <a:rPr b="1" i="0" lang="en-US" sz="1800" u="none" cap="none" strike="noStrike">
-                <a:solidFill>
-                  <a:srgbClr val="FFFFFF"/>
-                </a:solidFill>
-                <a:latin typeface="Calibri"/>
-                <a:ea typeface="Calibri"/>
-                <a:cs typeface="Calibri"/>
-                <a:sym typeface="Calibri"/>
-              </a:rPr>
-              <a:t>1</a:t>
-            </a:r>
-            <a:endParaRPr/>
-          </a:p>
-        </p:txBody>
-      </p:sp>
-      <p:sp>
-        <p:nvSpPr>
-          <p:cNvPr id="110" name="Google Shape;110;p16"/>
-          <p:cNvSpPr txBox="1"/>
-          <p:nvPr/>
-        </p:nvSpPr>
-        <p:spPr>
-          <a:xfrm>
-            <a:off x="1554480" y="1554480"/>
-            <a:ext cx="7315200" cy="384048"/>
-          </a:xfrm>
-          <a:prstGeom prst="rect">
-            <a:avLst/>
-          </a:prstGeom>
-          <a:noFill/>
-          <a:ln>
-            <a:noFill/>
-          </a:ln>
-        </p:spPr>
-        <p:txBody>
-          <a:bodyPr anchorCtr="0" anchor="t" bIns="45700" lIns="91425" spcFirstLastPara="1" rIns="91425" wrap="square" tIns="45700">
-            <a:spAutoFit/>
-          </a:bodyPr>
-          <a:lstStyle/>
-          <a:p>
-            <a:pPr indent="0" lvl="0" marL="0" marR="0" rtl="0" algn="l">
-              <a:spcBef>
-                <a:spcPts val="0"/>
-              </a:spcBef>
-              <a:spcAft>
-                <a:spcPts val="0"/>
-              </a:spcAft>
-              <a:buNone/>
-            </a:pPr>
-            <a:r>
-              <a:rPr b="1" i="0" lang="en-US" sz="1600" u="none" cap="none" strike="noStrike">
-                <a:solidFill>
-                  <a:srgbClr val="0E3A66"/>
-                </a:solidFill>
-                <a:latin typeface="Calibri"/>
-                <a:ea typeface="Calibri"/>
-                <a:cs typeface="Calibri"/>
-                <a:sym typeface="Calibri"/>
-              </a:rPr>
-              <a:t>Problem Statement &amp; Customer Challenges</a:t>
-            </a:r>
-            <a:endParaRPr/>
-          </a:p>
-        </p:txBody>
-      </p:sp>
-      <p:sp>
-        <p:nvSpPr>
-          <p:cNvPr id="111" name="Google Shape;111;p16"/>
-          <p:cNvSpPr txBox="1"/>
-          <p:nvPr/>
-        </p:nvSpPr>
-        <p:spPr>
-          <a:xfrm>
-            <a:off x="9601200" y="1554480"/>
-            <a:ext cx="1371600" cy="384048"/>
-          </a:xfrm>
-          <a:prstGeom prst="rect">
-            <a:avLst/>
-          </a:prstGeom>
-          <a:noFill/>
-          <a:ln>
-            <a:noFill/>
-          </a:ln>
-        </p:spPr>
-        <p:txBody>
-          <a:bodyPr anchorCtr="0" anchor="t" bIns="45700" lIns="91425" spcFirstLastPara="1" rIns="91425" wrap="square" tIns="45700">
-            <a:spAutoFit/>
-          </a:bodyPr>
-          <a:lstStyle/>
-          <a:p>
-            <a:pPr indent="0" lvl="0" marL="0" marR="0" rtl="0" algn="r">
-              <a:spcBef>
-                <a:spcPts val="0"/>
-              </a:spcBef>
-              <a:spcAft>
-                <a:spcPts val="0"/>
-              </a:spcAft>
-              <a:buNone/>
-            </a:pPr>
-            <a:r>
-              <a:rPr b="0" i="0" lang="en-US" sz="1400" u="none" cap="none" strike="noStrike">
-                <a:solidFill>
-                  <a:srgbClr val="0F766E"/>
-                </a:solidFill>
-                <a:latin typeface="Calibri"/>
-                <a:ea typeface="Calibri"/>
-                <a:cs typeface="Calibri"/>
-                <a:sym typeface="Calibri"/>
-              </a:rPr>
-              <a:t>3 min</a:t>
-            </a:r>
-            <a:endParaRPr/>
-          </a:p>
-        </p:txBody>
-      </p:sp>
-      <p:sp>
-        <p:nvSpPr>
-          <p:cNvPr id="112" name="Google Shape;112;p16"/>
-          <p:cNvSpPr/>
-          <p:nvPr/>
-        </p:nvSpPr>
-        <p:spPr>
-          <a:xfrm>
-            <a:off x="731520" y="2221992"/>
-            <a:ext cx="10515600" cy="658368"/>
-          </a:xfrm>
-          <a:prstGeom prst="roundRect">
-            <a:avLst>
-              <a:gd fmla="val 16667" name="adj"/>
-            </a:avLst>
-          </a:prstGeom>
-          <a:solidFill>
-            <a:srgbClr val="FFFFFF"/>
-          </a:solidFill>
-          <a:ln cap="flat" cmpd="sng" w="12700">
-            <a:solidFill>
-              <a:srgbClr val="DDDDDD"/>
-            </a:solidFill>
-            <a:prstDash val="solid"/>
-            <a:round/>
-            <a:headEnd len="sm" w="sm" type="none"/>
-            <a:tailEnd len="sm" w="sm" type="none"/>
-          </a:ln>
-        </p:spPr>
-        <p:txBody>
-          <a:bodyPr anchorCtr="0" anchor="ctr" bIns="45700" lIns="91425" spcFirstLastPara="1" rIns="91425" wrap="square" tIns="45700">
-            <a:noAutofit/>
-          </a:bodyPr>
-          <a:lstStyle/>
-          <a:p>
-            <a:pPr indent="0" lvl="0" marL="0" marR="0" rtl="0" algn="ctr">
-              <a:spcBef>
-                <a:spcPts val="0"/>
-              </a:spcBef>
-              <a:spcAft>
-                <a:spcPts val="0"/>
-              </a:spcAft>
-              <a:buNone/>
-            </a:pPr>
-            <a:r>
-              <a:t/>
-            </a:r>
-            <a:endParaRPr b="0" i="0" sz="1800" u="none" cap="none" strike="noStrike">
-              <a:solidFill>
-                <a:schemeClr val="dk1"/>
-              </a:solidFill>
-              <a:latin typeface="Calibri"/>
-              <a:ea typeface="Calibri"/>
-              <a:cs typeface="Calibri"/>
-              <a:sym typeface="Calibri"/>
-            </a:endParaRPr>
-          </a:p>
-        </p:txBody>
-      </p:sp>
-      <p:sp>
-        <p:nvSpPr>
-          <p:cNvPr id="113" name="Google Shape;113;p16"/>
-          <p:cNvSpPr/>
-          <p:nvPr/>
-        </p:nvSpPr>
-        <p:spPr>
-          <a:xfrm>
-            <a:off x="914400" y="2322576"/>
-            <a:ext cx="457200" cy="457200"/>
-          </a:xfrm>
-          <a:prstGeom prst="roundRect">
-            <a:avLst>
-              <a:gd fmla="val 16667" name="adj"/>
-            </a:avLst>
-          </a:prstGeom>
-          <a:solidFill>
-            <a:srgbClr val="115594"/>
-          </a:solidFill>
-          <a:ln>
-            <a:noFill/>
-          </a:ln>
-        </p:spPr>
-        <p:txBody>
-          <a:bodyPr anchorCtr="0" anchor="ctr" bIns="45700" lIns="91425" spcFirstLastPara="1" rIns="91425" wrap="square" tIns="45700">
-            <a:noAutofit/>
-          </a:bodyPr>
-          <a:lstStyle/>
-          <a:p>
-            <a:pPr indent="0" lvl="0" marL="0" marR="0" rtl="0" algn="ctr">
-              <a:spcBef>
-                <a:spcPts val="0"/>
-              </a:spcBef>
-              <a:spcAft>
-                <a:spcPts val="0"/>
-              </a:spcAft>
-              <a:buNone/>
-            </a:pPr>
-            <a:r>
-              <a:t/>
-            </a:r>
-            <a:endParaRPr b="0" i="0" sz="1800" u="none" cap="none" strike="noStrike">
-              <a:solidFill>
-                <a:schemeClr val="dk1"/>
-              </a:solidFill>
-              <a:latin typeface="Calibri"/>
-              <a:ea typeface="Calibri"/>
-              <a:cs typeface="Calibri"/>
-              <a:sym typeface="Calibri"/>
-            </a:endParaRPr>
-          </a:p>
-        </p:txBody>
-      </p:sp>
-      <p:sp>
-        <p:nvSpPr>
-          <p:cNvPr id="114" name="Google Shape;114;p16"/>
-          <p:cNvSpPr txBox="1"/>
-          <p:nvPr/>
-        </p:nvSpPr>
-        <p:spPr>
-          <a:xfrm>
-            <a:off x="914400" y="2322576"/>
-            <a:ext cx="457200" cy="457200"/>
-          </a:xfrm>
-          <a:prstGeom prst="rect">
-            <a:avLst/>
-          </a:prstGeom>
-          <a:noFill/>
-          <a:ln>
-            <a:noFill/>
-          </a:ln>
-        </p:spPr>
-        <p:txBody>
-          <a:bodyPr anchorCtr="0" anchor="t" bIns="45700" lIns="91425" spcFirstLastPara="1" rIns="91425" wrap="square" tIns="45700">
-            <a:spAutoFit/>
-          </a:bodyPr>
-          <a:lstStyle/>
-          <a:p>
-            <a:pPr indent="0" lvl="0" marL="0" marR="0" rtl="0" algn="ctr">
-              <a:spcBef>
-                <a:spcPts val="0"/>
-              </a:spcBef>
-              <a:spcAft>
-                <a:spcPts val="0"/>
-              </a:spcAft>
-              <a:buNone/>
-            </a:pPr>
-            <a:r>
-              <a:rPr b="1" i="0" lang="en-US" sz="1800" u="none" cap="none" strike="noStrike">
-                <a:solidFill>
-                  <a:srgbClr val="FFFFFF"/>
-                </a:solidFill>
-                <a:latin typeface="Calibri"/>
-                <a:ea typeface="Calibri"/>
-                <a:cs typeface="Calibri"/>
-                <a:sym typeface="Calibri"/>
-              </a:rPr>
-              <a:t>2</a:t>
-            </a:r>
-            <a:endParaRPr/>
-          </a:p>
-        </p:txBody>
-      </p:sp>
-      <p:sp>
-        <p:nvSpPr>
-          <p:cNvPr id="115" name="Google Shape;115;p16"/>
-          <p:cNvSpPr txBox="1"/>
-          <p:nvPr/>
-        </p:nvSpPr>
-        <p:spPr>
-          <a:xfrm>
-            <a:off x="1554480" y="2359152"/>
-            <a:ext cx="7315200" cy="384048"/>
-          </a:xfrm>
-          <a:prstGeom prst="rect">
-            <a:avLst/>
-          </a:prstGeom>
-          <a:noFill/>
-          <a:ln>
-            <a:noFill/>
-          </a:ln>
-        </p:spPr>
-        <p:txBody>
-          <a:bodyPr anchorCtr="0" anchor="t" bIns="45700" lIns="91425" spcFirstLastPara="1" rIns="91425" wrap="square" tIns="45700">
-            <a:spAutoFit/>
-          </a:bodyPr>
-          <a:lstStyle/>
-          <a:p>
-            <a:pPr indent="0" lvl="0" marL="0" marR="0" rtl="0" algn="l">
-              <a:spcBef>
-                <a:spcPts val="0"/>
-              </a:spcBef>
-              <a:spcAft>
-                <a:spcPts val="0"/>
-              </a:spcAft>
-              <a:buNone/>
-            </a:pPr>
-            <a:r>
-              <a:rPr b="1" i="0" lang="en-US" sz="1600" u="none" cap="none" strike="noStrike">
-                <a:solidFill>
-                  <a:srgbClr val="0E3A66"/>
-                </a:solidFill>
-                <a:latin typeface="Calibri"/>
-                <a:ea typeface="Calibri"/>
-                <a:cs typeface="Calibri"/>
-                <a:sym typeface="Calibri"/>
-              </a:rPr>
-              <a:t>Requirements: Functional, Non-Functional, Constraints &amp; Assumptions</a:t>
-            </a:r>
-            <a:endParaRPr/>
-          </a:p>
-        </p:txBody>
-      </p:sp>
-      <p:sp>
-        <p:nvSpPr>
-          <p:cNvPr id="116" name="Google Shape;116;p16"/>
-          <p:cNvSpPr txBox="1"/>
-          <p:nvPr/>
-        </p:nvSpPr>
-        <p:spPr>
-          <a:xfrm>
-            <a:off x="9601200" y="2359152"/>
-            <a:ext cx="1371600" cy="384048"/>
-          </a:xfrm>
-          <a:prstGeom prst="rect">
-            <a:avLst/>
-          </a:prstGeom>
-          <a:noFill/>
-          <a:ln>
-            <a:noFill/>
-          </a:ln>
-        </p:spPr>
-        <p:txBody>
-          <a:bodyPr anchorCtr="0" anchor="t" bIns="45700" lIns="91425" spcFirstLastPara="1" rIns="91425" wrap="square" tIns="45700">
-            <a:spAutoFit/>
-          </a:bodyPr>
-          <a:lstStyle/>
-          <a:p>
-            <a:pPr indent="0" lvl="0" marL="0" marR="0" rtl="0" algn="r">
-              <a:spcBef>
-                <a:spcPts val="0"/>
-              </a:spcBef>
-              <a:spcAft>
-                <a:spcPts val="0"/>
-              </a:spcAft>
-              <a:buNone/>
-            </a:pPr>
-            <a:r>
-              <a:rPr b="0" i="0" lang="en-US" sz="1400" u="none" cap="none" strike="noStrike">
-                <a:solidFill>
-                  <a:srgbClr val="0F766E"/>
-                </a:solidFill>
-                <a:latin typeface="Calibri"/>
-                <a:ea typeface="Calibri"/>
-                <a:cs typeface="Calibri"/>
-                <a:sym typeface="Calibri"/>
-              </a:rPr>
-              <a:t>2 min</a:t>
-            </a:r>
-            <a:endParaRPr/>
-          </a:p>
-        </p:txBody>
-      </p:sp>
-      <p:sp>
-        <p:nvSpPr>
-          <p:cNvPr id="117" name="Google Shape;117;p16"/>
-          <p:cNvSpPr/>
-          <p:nvPr/>
-        </p:nvSpPr>
-        <p:spPr>
-          <a:xfrm>
-            <a:off x="731520" y="3026664"/>
-            <a:ext cx="10515600" cy="658368"/>
-          </a:xfrm>
-          <a:prstGeom prst="roundRect">
-            <a:avLst>
-              <a:gd fmla="val 16667" name="adj"/>
-            </a:avLst>
-          </a:prstGeom>
-          <a:solidFill>
-            <a:srgbClr val="FFFFFF"/>
-          </a:solidFill>
-          <a:ln cap="flat" cmpd="sng" w="12700">
-            <a:solidFill>
-              <a:srgbClr val="DDDDDD"/>
-            </a:solidFill>
-            <a:prstDash val="solid"/>
-            <a:round/>
-            <a:headEnd len="sm" w="sm" type="none"/>
-            <a:tailEnd len="sm" w="sm" type="none"/>
-          </a:ln>
-        </p:spPr>
-        <p:txBody>
-          <a:bodyPr anchorCtr="0" anchor="ctr" bIns="45700" lIns="91425" spcFirstLastPara="1" rIns="91425" wrap="square" tIns="45700">
-            <a:noAutofit/>
-          </a:bodyPr>
-          <a:lstStyle/>
-          <a:p>
-            <a:pPr indent="0" lvl="0" marL="0" marR="0" rtl="0" algn="ctr">
-              <a:spcBef>
-                <a:spcPts val="0"/>
-              </a:spcBef>
-              <a:spcAft>
-                <a:spcPts val="0"/>
-              </a:spcAft>
-              <a:buNone/>
-            </a:pPr>
-            <a:r>
-              <a:t/>
-            </a:r>
-            <a:endParaRPr b="0" i="0" sz="1800" u="none" cap="none" strike="noStrike">
-              <a:solidFill>
-                <a:schemeClr val="dk1"/>
-              </a:solidFill>
-              <a:latin typeface="Calibri"/>
-              <a:ea typeface="Calibri"/>
-              <a:cs typeface="Calibri"/>
-              <a:sym typeface="Calibri"/>
-            </a:endParaRPr>
-          </a:p>
-        </p:txBody>
-      </p:sp>
-      <p:sp>
-        <p:nvSpPr>
-          <p:cNvPr id="118" name="Google Shape;118;p16"/>
-          <p:cNvSpPr/>
-          <p:nvPr/>
-        </p:nvSpPr>
-        <p:spPr>
-          <a:xfrm>
-            <a:off x="914400" y="3127248"/>
-            <a:ext cx="457200" cy="457200"/>
-          </a:xfrm>
-          <a:prstGeom prst="roundRect">
-            <a:avLst>
-              <a:gd fmla="val 16667" name="adj"/>
-            </a:avLst>
-          </a:prstGeom>
-          <a:solidFill>
-            <a:srgbClr val="115594"/>
-          </a:solidFill>
-          <a:ln>
-            <a:noFill/>
-          </a:ln>
-        </p:spPr>
-        <p:txBody>
-          <a:bodyPr anchorCtr="0" anchor="ctr" bIns="45700" lIns="91425" spcFirstLastPara="1" rIns="91425" wrap="square" tIns="45700">
-            <a:noAutofit/>
-          </a:bodyPr>
-          <a:lstStyle/>
-          <a:p>
-            <a:pPr indent="0" lvl="0" marL="0" marR="0" rtl="0" algn="ctr">
-              <a:spcBef>
-                <a:spcPts val="0"/>
-              </a:spcBef>
-              <a:spcAft>
-                <a:spcPts val="0"/>
-              </a:spcAft>
-              <a:buNone/>
-            </a:pPr>
-            <a:r>
-              <a:t/>
-            </a:r>
-            <a:endParaRPr b="0" i="0" sz="1800" u="none" cap="none" strike="noStrike">
-              <a:solidFill>
-                <a:schemeClr val="dk1"/>
-              </a:solidFill>
-              <a:latin typeface="Calibri"/>
-              <a:ea typeface="Calibri"/>
-              <a:cs typeface="Calibri"/>
-              <a:sym typeface="Calibri"/>
-            </a:endParaRPr>
-          </a:p>
-        </p:txBody>
-      </p:sp>
-      <p:sp>
-        <p:nvSpPr>
-          <p:cNvPr id="119" name="Google Shape;119;p16"/>
-          <p:cNvSpPr txBox="1"/>
-          <p:nvPr/>
-        </p:nvSpPr>
-        <p:spPr>
-          <a:xfrm>
-            <a:off x="914400" y="3127248"/>
-            <a:ext cx="457200" cy="457200"/>
-          </a:xfrm>
-          <a:prstGeom prst="rect">
-            <a:avLst/>
-          </a:prstGeom>
-          <a:noFill/>
-          <a:ln>
-            <a:noFill/>
-          </a:ln>
-        </p:spPr>
-        <p:txBody>
-          <a:bodyPr anchorCtr="0" anchor="t" bIns="45700" lIns="91425" spcFirstLastPara="1" rIns="91425" wrap="square" tIns="45700">
-            <a:spAutoFit/>
-          </a:bodyPr>
-          <a:lstStyle/>
-          <a:p>
-            <a:pPr indent="0" lvl="0" marL="0" marR="0" rtl="0" algn="ctr">
-              <a:spcBef>
-                <a:spcPts val="0"/>
-              </a:spcBef>
-              <a:spcAft>
-                <a:spcPts val="0"/>
-              </a:spcAft>
-              <a:buNone/>
-            </a:pPr>
-            <a:r>
-              <a:rPr b="1" i="0" lang="en-US" sz="1800" u="none" cap="none" strike="noStrike">
-                <a:solidFill>
-                  <a:srgbClr val="FFFFFF"/>
-                </a:solidFill>
-                <a:latin typeface="Calibri"/>
-                <a:ea typeface="Calibri"/>
-                <a:cs typeface="Calibri"/>
-                <a:sym typeface="Calibri"/>
-              </a:rPr>
-              <a:t>3</a:t>
-            </a:r>
-            <a:endParaRPr/>
-          </a:p>
-        </p:txBody>
-      </p:sp>
-      <p:sp>
-        <p:nvSpPr>
-          <p:cNvPr id="120" name="Google Shape;120;p16"/>
-          <p:cNvSpPr txBox="1"/>
-          <p:nvPr/>
-        </p:nvSpPr>
-        <p:spPr>
-          <a:xfrm>
-            <a:off x="1554480" y="3163824"/>
-            <a:ext cx="7315200" cy="384048"/>
-          </a:xfrm>
-          <a:prstGeom prst="rect">
-            <a:avLst/>
-          </a:prstGeom>
-          <a:noFill/>
-          <a:ln>
-            <a:noFill/>
-          </a:ln>
-        </p:spPr>
-        <p:txBody>
-          <a:bodyPr anchorCtr="0" anchor="t" bIns="45700" lIns="91425" spcFirstLastPara="1" rIns="91425" wrap="square" tIns="45700">
-            <a:spAutoFit/>
-          </a:bodyPr>
-          <a:lstStyle/>
-          <a:p>
-            <a:pPr indent="0" lvl="0" marL="0" marR="0" rtl="0" algn="l">
-              <a:spcBef>
-                <a:spcPts val="0"/>
-              </a:spcBef>
-              <a:spcAft>
-                <a:spcPts val="0"/>
-              </a:spcAft>
-              <a:buNone/>
-            </a:pPr>
-            <a:r>
-              <a:rPr b="1" i="0" lang="en-US" sz="1600" u="none" cap="none" strike="noStrike">
-                <a:solidFill>
-                  <a:srgbClr val="0E3A66"/>
-                </a:solidFill>
-                <a:latin typeface="Calibri"/>
-                <a:ea typeface="Calibri"/>
-                <a:cs typeface="Calibri"/>
-                <a:sym typeface="Calibri"/>
-              </a:rPr>
-              <a:t>Solution Architecture — 4+1 View Model</a:t>
-            </a:r>
-            <a:endParaRPr/>
-          </a:p>
-        </p:txBody>
-      </p:sp>
-      <p:sp>
-        <p:nvSpPr>
-          <p:cNvPr id="121" name="Google Shape;121;p16"/>
-          <p:cNvSpPr txBox="1"/>
-          <p:nvPr/>
-        </p:nvSpPr>
-        <p:spPr>
-          <a:xfrm>
-            <a:off x="9601200" y="3163824"/>
-            <a:ext cx="1371600" cy="384048"/>
-          </a:xfrm>
-          <a:prstGeom prst="rect">
-            <a:avLst/>
-          </a:prstGeom>
-          <a:noFill/>
-          <a:ln>
-            <a:noFill/>
-          </a:ln>
-        </p:spPr>
-        <p:txBody>
-          <a:bodyPr anchorCtr="0" anchor="t" bIns="45700" lIns="91425" spcFirstLastPara="1" rIns="91425" wrap="square" tIns="45700">
-            <a:spAutoFit/>
-          </a:bodyPr>
-          <a:lstStyle/>
-          <a:p>
-            <a:pPr indent="0" lvl="0" marL="0" marR="0" rtl="0" algn="r">
-              <a:spcBef>
-                <a:spcPts val="0"/>
-              </a:spcBef>
-              <a:spcAft>
-                <a:spcPts val="0"/>
-              </a:spcAft>
-              <a:buNone/>
-            </a:pPr>
-            <a:r>
-              <a:rPr b="0" i="0" lang="en-US" sz="1400" u="none" cap="none" strike="noStrike">
-                <a:solidFill>
-                  <a:srgbClr val="0F766E"/>
-                </a:solidFill>
-                <a:latin typeface="Calibri"/>
-                <a:ea typeface="Calibri"/>
-                <a:cs typeface="Calibri"/>
-                <a:sym typeface="Calibri"/>
-              </a:rPr>
-              <a:t>5 min</a:t>
-            </a:r>
-            <a:endParaRPr/>
-          </a:p>
-        </p:txBody>
-      </p:sp>
-      <p:sp>
-        <p:nvSpPr>
-          <p:cNvPr id="122" name="Google Shape;122;p16"/>
-          <p:cNvSpPr/>
-          <p:nvPr/>
-        </p:nvSpPr>
-        <p:spPr>
-          <a:xfrm>
-            <a:off x="731520" y="3831336"/>
-            <a:ext cx="10515600" cy="658368"/>
-          </a:xfrm>
-          <a:prstGeom prst="roundRect">
-            <a:avLst>
-              <a:gd fmla="val 16667" name="adj"/>
-            </a:avLst>
-          </a:prstGeom>
-          <a:solidFill>
-            <a:srgbClr val="FFFFFF"/>
-          </a:solidFill>
-          <a:ln cap="flat" cmpd="sng" w="12700">
-            <a:solidFill>
-              <a:srgbClr val="DDDDDD"/>
-            </a:solidFill>
-            <a:prstDash val="solid"/>
-            <a:round/>
-            <a:headEnd len="sm" w="sm" type="none"/>
-            <a:tailEnd len="sm" w="sm" type="none"/>
-          </a:ln>
-        </p:spPr>
-        <p:txBody>
-          <a:bodyPr anchorCtr="0" anchor="ctr" bIns="45700" lIns="91425" spcFirstLastPara="1" rIns="91425" wrap="square" tIns="45700">
-            <a:noAutofit/>
-          </a:bodyPr>
-          <a:lstStyle/>
-          <a:p>
-            <a:pPr indent="0" lvl="0" marL="0" marR="0" rtl="0" algn="ctr">
-              <a:spcBef>
-                <a:spcPts val="0"/>
-              </a:spcBef>
-              <a:spcAft>
-                <a:spcPts val="0"/>
-              </a:spcAft>
-              <a:buNone/>
-            </a:pPr>
-            <a:r>
-              <a:t/>
-            </a:r>
-            <a:endParaRPr b="0" i="0" sz="1800" u="none" cap="none" strike="noStrike">
-              <a:solidFill>
-                <a:schemeClr val="dk1"/>
-              </a:solidFill>
-              <a:latin typeface="Calibri"/>
-              <a:ea typeface="Calibri"/>
-              <a:cs typeface="Calibri"/>
-              <a:sym typeface="Calibri"/>
-            </a:endParaRPr>
-          </a:p>
-        </p:txBody>
-      </p:sp>
-      <p:sp>
-        <p:nvSpPr>
-          <p:cNvPr id="123" name="Google Shape;123;p16"/>
-          <p:cNvSpPr/>
-          <p:nvPr/>
-        </p:nvSpPr>
-        <p:spPr>
-          <a:xfrm>
-            <a:off x="914400" y="3931920"/>
-            <a:ext cx="457200" cy="457200"/>
-          </a:xfrm>
-          <a:prstGeom prst="roundRect">
-            <a:avLst>
-              <a:gd fmla="val 16667" name="adj"/>
-            </a:avLst>
-          </a:prstGeom>
-          <a:solidFill>
-            <a:srgbClr val="115594"/>
-          </a:solidFill>
-          <a:ln>
-            <a:noFill/>
-          </a:ln>
-        </p:spPr>
-        <p:txBody>
-          <a:bodyPr anchorCtr="0" anchor="ctr" bIns="45700" lIns="91425" spcFirstLastPara="1" rIns="91425" wrap="square" tIns="45700">
-            <a:noAutofit/>
-          </a:bodyPr>
-          <a:lstStyle/>
-          <a:p>
-            <a:pPr indent="0" lvl="0" marL="0" marR="0" rtl="0" algn="ctr">
-              <a:spcBef>
-                <a:spcPts val="0"/>
-              </a:spcBef>
-              <a:spcAft>
-                <a:spcPts val="0"/>
-              </a:spcAft>
-              <a:buNone/>
-            </a:pPr>
-            <a:r>
-              <a:t/>
-            </a:r>
-            <a:endParaRPr b="0" i="0" sz="1800" u="none" cap="none" strike="noStrike">
-              <a:solidFill>
-                <a:schemeClr val="dk1"/>
-              </a:solidFill>
-              <a:latin typeface="Calibri"/>
-              <a:ea typeface="Calibri"/>
-              <a:cs typeface="Calibri"/>
-              <a:sym typeface="Calibri"/>
-            </a:endParaRPr>
-          </a:p>
-        </p:txBody>
-      </p:sp>
-      <p:sp>
-        <p:nvSpPr>
-          <p:cNvPr id="124" name="Google Shape;124;p16"/>
-          <p:cNvSpPr txBox="1"/>
-          <p:nvPr/>
-        </p:nvSpPr>
-        <p:spPr>
-          <a:xfrm>
-            <a:off x="914400" y="3931920"/>
-            <a:ext cx="457200" cy="457200"/>
-          </a:xfrm>
-          <a:prstGeom prst="rect">
-            <a:avLst/>
-          </a:prstGeom>
-          <a:noFill/>
-          <a:ln>
-            <a:noFill/>
-          </a:ln>
-        </p:spPr>
-        <p:txBody>
-          <a:bodyPr anchorCtr="0" anchor="t" bIns="45700" lIns="91425" spcFirstLastPara="1" rIns="91425" wrap="square" tIns="45700">
-            <a:spAutoFit/>
-          </a:bodyPr>
-          <a:lstStyle/>
-          <a:p>
-            <a:pPr indent="0" lvl="0" marL="0" marR="0" rtl="0" algn="ctr">
-              <a:spcBef>
-                <a:spcPts val="0"/>
-              </a:spcBef>
-              <a:spcAft>
-                <a:spcPts val="0"/>
-              </a:spcAft>
-              <a:buNone/>
-            </a:pPr>
-            <a:r>
-              <a:rPr b="1" i="0" lang="en-US" sz="1800" u="none" cap="none" strike="noStrike">
-                <a:solidFill>
-                  <a:srgbClr val="FFFFFF"/>
-                </a:solidFill>
-                <a:latin typeface="Calibri"/>
-                <a:ea typeface="Calibri"/>
-                <a:cs typeface="Calibri"/>
-                <a:sym typeface="Calibri"/>
-              </a:rPr>
-              <a:t>4</a:t>
-            </a:r>
-            <a:endParaRPr/>
-          </a:p>
-        </p:txBody>
-      </p:sp>
-      <p:sp>
-        <p:nvSpPr>
-          <p:cNvPr id="125" name="Google Shape;125;p16"/>
-          <p:cNvSpPr txBox="1"/>
-          <p:nvPr/>
-        </p:nvSpPr>
-        <p:spPr>
-          <a:xfrm>
-            <a:off x="1554480" y="3968496"/>
-            <a:ext cx="7315200" cy="384048"/>
-          </a:xfrm>
-          <a:prstGeom prst="rect">
-            <a:avLst/>
-          </a:prstGeom>
-          <a:noFill/>
-          <a:ln>
-            <a:noFill/>
-          </a:ln>
-        </p:spPr>
-        <p:txBody>
-          <a:bodyPr anchorCtr="0" anchor="t" bIns="45700" lIns="91425" spcFirstLastPara="1" rIns="91425" wrap="square" tIns="45700">
-            <a:spAutoFit/>
-          </a:bodyPr>
-          <a:lstStyle/>
-          <a:p>
-            <a:pPr indent="0" lvl="0" marL="0" marR="0" rtl="0" algn="l">
-              <a:spcBef>
-                <a:spcPts val="0"/>
-              </a:spcBef>
-              <a:spcAft>
-                <a:spcPts val="0"/>
-              </a:spcAft>
-              <a:buNone/>
-            </a:pPr>
-            <a:r>
-              <a:rPr b="1" i="0" lang="en-US" sz="1600" u="none" cap="none" strike="noStrike">
-                <a:solidFill>
-                  <a:srgbClr val="0E3A66"/>
-                </a:solidFill>
-                <a:latin typeface="Calibri"/>
-                <a:ea typeface="Calibri"/>
-                <a:cs typeface="Calibri"/>
-                <a:sym typeface="Calibri"/>
-              </a:rPr>
-              <a:t>Solution Benefits</a:t>
-            </a:r>
-            <a:endParaRPr/>
-          </a:p>
-        </p:txBody>
-      </p:sp>
-      <p:sp>
-        <p:nvSpPr>
-          <p:cNvPr id="126" name="Google Shape;126;p16"/>
-          <p:cNvSpPr txBox="1"/>
-          <p:nvPr/>
-        </p:nvSpPr>
-        <p:spPr>
-          <a:xfrm>
-            <a:off x="9601200" y="3968496"/>
-            <a:ext cx="1371600" cy="384048"/>
-          </a:xfrm>
-          <a:prstGeom prst="rect">
-            <a:avLst/>
-          </a:prstGeom>
-          <a:noFill/>
-          <a:ln>
-            <a:noFill/>
-          </a:ln>
-        </p:spPr>
-        <p:txBody>
-          <a:bodyPr anchorCtr="0" anchor="t" bIns="45700" lIns="91425" spcFirstLastPara="1" rIns="91425" wrap="square" tIns="45700">
-            <a:spAutoFit/>
-          </a:bodyPr>
-          <a:lstStyle/>
-          <a:p>
-            <a:pPr indent="0" lvl="0" marL="0" marR="0" rtl="0" algn="r">
-              <a:spcBef>
-                <a:spcPts val="0"/>
-              </a:spcBef>
-              <a:spcAft>
-                <a:spcPts val="0"/>
-              </a:spcAft>
-              <a:buNone/>
-            </a:pPr>
-            <a:r>
-              <a:rPr b="0" i="0" lang="en-US" sz="1400" u="none" cap="none" strike="noStrike">
-                <a:solidFill>
-                  <a:srgbClr val="0F766E"/>
-                </a:solidFill>
-                <a:latin typeface="Calibri"/>
-                <a:ea typeface="Calibri"/>
-                <a:cs typeface="Calibri"/>
-                <a:sym typeface="Calibri"/>
-              </a:rPr>
-              <a:t>2 min</a:t>
-            </a:r>
-            <a:endParaRPr/>
-          </a:p>
-        </p:txBody>
-      </p:sp>
-      <p:sp>
-        <p:nvSpPr>
-          <p:cNvPr id="127" name="Google Shape;127;p16"/>
-          <p:cNvSpPr/>
-          <p:nvPr/>
-        </p:nvSpPr>
-        <p:spPr>
-          <a:xfrm>
-            <a:off x="731520" y="4636008"/>
-            <a:ext cx="10515600" cy="658368"/>
-          </a:xfrm>
-          <a:prstGeom prst="roundRect">
-            <a:avLst>
-              <a:gd fmla="val 16667" name="adj"/>
-            </a:avLst>
-          </a:prstGeom>
-          <a:solidFill>
-            <a:srgbClr val="FFFFFF"/>
-          </a:solidFill>
-          <a:ln cap="flat" cmpd="sng" w="12700">
-            <a:solidFill>
-              <a:srgbClr val="DDDDDD"/>
-            </a:solidFill>
-            <a:prstDash val="solid"/>
-            <a:round/>
-            <a:headEnd len="sm" w="sm" type="none"/>
-            <a:tailEnd len="sm" w="sm" type="none"/>
-          </a:ln>
-        </p:spPr>
-        <p:txBody>
-          <a:bodyPr anchorCtr="0" anchor="ctr" bIns="45700" lIns="91425" spcFirstLastPara="1" rIns="91425" wrap="square" tIns="45700">
-            <a:noAutofit/>
-          </a:bodyPr>
-          <a:lstStyle/>
-          <a:p>
-            <a:pPr indent="0" lvl="0" marL="0" marR="0" rtl="0" algn="ctr">
-              <a:spcBef>
-                <a:spcPts val="0"/>
-              </a:spcBef>
-              <a:spcAft>
-                <a:spcPts val="0"/>
-              </a:spcAft>
-              <a:buNone/>
-            </a:pPr>
-            <a:r>
-              <a:t/>
-            </a:r>
-            <a:endParaRPr b="0" i="0" sz="1800" u="none" cap="none" strike="noStrike">
-              <a:solidFill>
-                <a:schemeClr val="dk1"/>
-              </a:solidFill>
-              <a:latin typeface="Calibri"/>
-              <a:ea typeface="Calibri"/>
-              <a:cs typeface="Calibri"/>
-              <a:sym typeface="Calibri"/>
-            </a:endParaRPr>
-          </a:p>
-        </p:txBody>
-      </p:sp>
-      <p:sp>
-        <p:nvSpPr>
-          <p:cNvPr id="128" name="Google Shape;128;p16"/>
-          <p:cNvSpPr/>
-          <p:nvPr/>
-        </p:nvSpPr>
-        <p:spPr>
-          <a:xfrm>
-            <a:off x="914400" y="4736592"/>
-            <a:ext cx="457200" cy="457200"/>
-          </a:xfrm>
-          <a:prstGeom prst="roundRect">
-            <a:avLst>
-              <a:gd fmla="val 16667" name="adj"/>
-            </a:avLst>
-          </a:prstGeom>
-          <a:solidFill>
-            <a:srgbClr val="115594"/>
-          </a:solidFill>
-          <a:ln>
-            <a:noFill/>
-          </a:ln>
-        </p:spPr>
-        <p:txBody>
-          <a:bodyPr anchorCtr="0" anchor="ctr" bIns="45700" lIns="91425" spcFirstLastPara="1" rIns="91425" wrap="square" tIns="45700">
-            <a:noAutofit/>
-          </a:bodyPr>
-          <a:lstStyle/>
-          <a:p>
-            <a:pPr indent="0" lvl="0" marL="0" marR="0" rtl="0" algn="ctr">
-              <a:spcBef>
-                <a:spcPts val="0"/>
-              </a:spcBef>
-              <a:spcAft>
-                <a:spcPts val="0"/>
-              </a:spcAft>
-              <a:buNone/>
-            </a:pPr>
-            <a:r>
-              <a:t/>
-            </a:r>
-            <a:endParaRPr b="0" i="0" sz="1800" u="none" cap="none" strike="noStrike">
-              <a:solidFill>
-                <a:schemeClr val="dk1"/>
-              </a:solidFill>
-              <a:latin typeface="Calibri"/>
-              <a:ea typeface="Calibri"/>
-              <a:cs typeface="Calibri"/>
-              <a:sym typeface="Calibri"/>
-            </a:endParaRPr>
-          </a:p>
-        </p:txBody>
-      </p:sp>
-      <p:sp>
-        <p:nvSpPr>
-          <p:cNvPr id="129" name="Google Shape;129;p16"/>
-          <p:cNvSpPr txBox="1"/>
-          <p:nvPr/>
-        </p:nvSpPr>
-        <p:spPr>
-          <a:xfrm>
-            <a:off x="914400" y="4736592"/>
-            <a:ext cx="457200" cy="457200"/>
-          </a:xfrm>
-          <a:prstGeom prst="rect">
-            <a:avLst/>
-          </a:prstGeom>
-          <a:noFill/>
-          <a:ln>
-            <a:noFill/>
-          </a:ln>
-        </p:spPr>
-        <p:txBody>
-          <a:bodyPr anchorCtr="0" anchor="t" bIns="45700" lIns="91425" spcFirstLastPara="1" rIns="91425" wrap="square" tIns="45700">
-            <a:spAutoFit/>
-          </a:bodyPr>
-          <a:lstStyle/>
-          <a:p>
-            <a:pPr indent="0" lvl="0" marL="0" marR="0" rtl="0" algn="ctr">
-              <a:spcBef>
-                <a:spcPts val="0"/>
-              </a:spcBef>
-              <a:spcAft>
-                <a:spcPts val="0"/>
-              </a:spcAft>
-              <a:buNone/>
-            </a:pPr>
-            <a:r>
-              <a:rPr b="1" i="0" lang="en-US" sz="1800" u="none" cap="none" strike="noStrike">
-                <a:solidFill>
-                  <a:srgbClr val="FFFFFF"/>
-                </a:solidFill>
-                <a:latin typeface="Calibri"/>
-                <a:ea typeface="Calibri"/>
-                <a:cs typeface="Calibri"/>
-                <a:sym typeface="Calibri"/>
-              </a:rPr>
-              <a:t>5</a:t>
-            </a:r>
-            <a:endParaRPr/>
-          </a:p>
-        </p:txBody>
-      </p:sp>
-      <p:sp>
-        <p:nvSpPr>
-          <p:cNvPr id="130" name="Google Shape;130;p16"/>
-          <p:cNvSpPr txBox="1"/>
-          <p:nvPr/>
-        </p:nvSpPr>
-        <p:spPr>
-          <a:xfrm>
-            <a:off x="1554480" y="4773168"/>
-            <a:ext cx="7315200" cy="338700"/>
-          </a:xfrm>
-          <a:prstGeom prst="rect">
-            <a:avLst/>
-          </a:prstGeom>
-          <a:noFill/>
-          <a:ln>
-            <a:noFill/>
-          </a:ln>
-        </p:spPr>
-        <p:txBody>
-          <a:bodyPr anchorCtr="0" anchor="t" bIns="45700" lIns="91425" spcFirstLastPara="1" rIns="91425" wrap="square" tIns="45700">
-            <a:spAutoFit/>
-          </a:bodyPr>
-          <a:lstStyle/>
-          <a:p>
-            <a:pPr indent="0" lvl="0" marL="0" marR="0" rtl="0" algn="l">
-              <a:spcBef>
-                <a:spcPts val="0"/>
-              </a:spcBef>
-              <a:spcAft>
-                <a:spcPts val="0"/>
-              </a:spcAft>
-              <a:buNone/>
-            </a:pPr>
-            <a:r>
-              <a:rPr b="1" i="0" lang="en-US" sz="1600" u="none" cap="none" strike="noStrike">
-                <a:solidFill>
-                  <a:srgbClr val="0E3A66"/>
-                </a:solidFill>
-                <a:latin typeface="Calibri"/>
-                <a:ea typeface="Calibri"/>
-                <a:cs typeface="Calibri"/>
-                <a:sym typeface="Calibri"/>
-              </a:rPr>
-              <a:t>Estimation: Development Effort &amp; Infrastructure Cost</a:t>
-            </a:r>
-            <a:endParaRPr/>
-          </a:p>
-        </p:txBody>
-      </p:sp>
-      <p:sp>
-        <p:nvSpPr>
-          <p:cNvPr id="131" name="Google Shape;131;p16"/>
-          <p:cNvSpPr txBox="1"/>
-          <p:nvPr/>
-        </p:nvSpPr>
-        <p:spPr>
-          <a:xfrm>
-            <a:off x="9601200" y="4773168"/>
-            <a:ext cx="1371600" cy="384048"/>
-          </a:xfrm>
-          <a:prstGeom prst="rect">
-            <a:avLst/>
-          </a:prstGeom>
-          <a:noFill/>
-          <a:ln>
-            <a:noFill/>
-          </a:ln>
-        </p:spPr>
-        <p:txBody>
-          <a:bodyPr anchorCtr="0" anchor="t" bIns="45700" lIns="91425" spcFirstLastPara="1" rIns="91425" wrap="square" tIns="45700">
-            <a:spAutoFit/>
-          </a:bodyPr>
-          <a:lstStyle/>
-          <a:p>
-            <a:pPr indent="0" lvl="0" marL="0" marR="0" rtl="0" algn="r">
-              <a:spcBef>
-                <a:spcPts val="0"/>
-              </a:spcBef>
-              <a:spcAft>
-                <a:spcPts val="0"/>
-              </a:spcAft>
-              <a:buNone/>
-            </a:pPr>
-            <a:r>
-              <a:rPr b="0" i="0" lang="en-US" sz="1400" u="none" cap="none" strike="noStrike">
-                <a:solidFill>
-                  <a:srgbClr val="0F766E"/>
-                </a:solidFill>
-                <a:latin typeface="Calibri"/>
-                <a:ea typeface="Calibri"/>
-                <a:cs typeface="Calibri"/>
-                <a:sym typeface="Calibri"/>
-              </a:rPr>
-              <a:t>2 min</a:t>
-            </a:r>
-            <a:endParaRPr/>
-          </a:p>
-        </p:txBody>
-      </p:sp>
-      <p:sp>
-        <p:nvSpPr>
-          <p:cNvPr id="132" name="Google Shape;132;p16"/>
-          <p:cNvSpPr/>
-          <p:nvPr/>
-        </p:nvSpPr>
-        <p:spPr>
-          <a:xfrm>
-            <a:off x="731520" y="5440680"/>
-            <a:ext cx="10515600" cy="658368"/>
-          </a:xfrm>
-          <a:prstGeom prst="roundRect">
-            <a:avLst>
-              <a:gd fmla="val 16667" name="adj"/>
-            </a:avLst>
-          </a:prstGeom>
-          <a:solidFill>
-            <a:srgbClr val="FFFFFF"/>
-          </a:solidFill>
-          <a:ln cap="flat" cmpd="sng" w="12700">
-            <a:solidFill>
-              <a:srgbClr val="DDDDDD"/>
-            </a:solidFill>
-            <a:prstDash val="solid"/>
-            <a:round/>
-            <a:headEnd len="sm" w="sm" type="none"/>
-            <a:tailEnd len="sm" w="sm" type="none"/>
-          </a:ln>
-        </p:spPr>
-        <p:txBody>
-          <a:bodyPr anchorCtr="0" anchor="ctr" bIns="45700" lIns="91425" spcFirstLastPara="1" rIns="91425" wrap="square" tIns="45700">
-            <a:noAutofit/>
-          </a:bodyPr>
-          <a:lstStyle/>
-          <a:p>
-            <a:pPr indent="0" lvl="0" marL="0" marR="0" rtl="0" algn="ctr">
-              <a:spcBef>
-                <a:spcPts val="0"/>
-              </a:spcBef>
-              <a:spcAft>
-                <a:spcPts val="0"/>
-              </a:spcAft>
-              <a:buNone/>
-            </a:pPr>
-            <a:r>
-              <a:t/>
-            </a:r>
-            <a:endParaRPr b="0" i="0" sz="1800" u="none" cap="none" strike="noStrike">
-              <a:solidFill>
-                <a:schemeClr val="dk1"/>
-              </a:solidFill>
-              <a:latin typeface="Calibri"/>
-              <a:ea typeface="Calibri"/>
-              <a:cs typeface="Calibri"/>
-              <a:sym typeface="Calibri"/>
-            </a:endParaRPr>
-          </a:p>
-        </p:txBody>
-      </p:sp>
-      <p:sp>
-        <p:nvSpPr>
-          <p:cNvPr id="133" name="Google Shape;133;p16"/>
-          <p:cNvSpPr/>
-          <p:nvPr/>
-        </p:nvSpPr>
-        <p:spPr>
-          <a:xfrm>
-            <a:off x="914400" y="5541264"/>
-            <a:ext cx="457200" cy="457200"/>
-          </a:xfrm>
-          <a:prstGeom prst="roundRect">
-            <a:avLst>
-              <a:gd fmla="val 16667" name="adj"/>
-            </a:avLst>
-          </a:prstGeom>
-          <a:solidFill>
-            <a:srgbClr val="115594"/>
-          </a:solidFill>
-          <a:ln>
-            <a:noFill/>
-          </a:ln>
-        </p:spPr>
-        <p:txBody>
-          <a:bodyPr anchorCtr="0" anchor="ctr" bIns="45700" lIns="91425" spcFirstLastPara="1" rIns="91425" wrap="square" tIns="45700">
-            <a:noAutofit/>
-          </a:bodyPr>
-          <a:lstStyle/>
-          <a:p>
-            <a:pPr indent="0" lvl="0" marL="0" marR="0" rtl="0" algn="ctr">
-              <a:spcBef>
-                <a:spcPts val="0"/>
-              </a:spcBef>
-              <a:spcAft>
-                <a:spcPts val="0"/>
-              </a:spcAft>
-              <a:buNone/>
-            </a:pPr>
-            <a:r>
-              <a:t/>
-            </a:r>
-            <a:endParaRPr b="0" i="0" sz="1800" u="none" cap="none" strike="noStrike">
-              <a:solidFill>
-                <a:schemeClr val="dk1"/>
-              </a:solidFill>
-              <a:latin typeface="Calibri"/>
-              <a:ea typeface="Calibri"/>
-              <a:cs typeface="Calibri"/>
-              <a:sym typeface="Calibri"/>
-            </a:endParaRPr>
-          </a:p>
-        </p:txBody>
-      </p:sp>
-      <p:sp>
-        <p:nvSpPr>
-          <p:cNvPr id="134" name="Google Shape;134;p16"/>
-          <p:cNvSpPr txBox="1"/>
-          <p:nvPr/>
-        </p:nvSpPr>
-        <p:spPr>
-          <a:xfrm>
-            <a:off x="914400" y="5541264"/>
-            <a:ext cx="457200" cy="457200"/>
-          </a:xfrm>
-          <a:prstGeom prst="rect">
-            <a:avLst/>
-          </a:prstGeom>
-          <a:noFill/>
-          <a:ln>
-            <a:noFill/>
-          </a:ln>
-        </p:spPr>
-        <p:txBody>
-          <a:bodyPr anchorCtr="0" anchor="t" bIns="45700" lIns="91425" spcFirstLastPara="1" rIns="91425" wrap="square" tIns="45700">
-            <a:spAutoFit/>
-          </a:bodyPr>
-          <a:lstStyle/>
-          <a:p>
-            <a:pPr indent="0" lvl="0" marL="0" marR="0" rtl="0" algn="ctr">
-              <a:spcBef>
-                <a:spcPts val="0"/>
-              </a:spcBef>
-              <a:spcAft>
-                <a:spcPts val="0"/>
-              </a:spcAft>
-              <a:buNone/>
-            </a:pPr>
-            <a:r>
-              <a:rPr b="1" i="0" lang="en-US" sz="1800" u="none" cap="none" strike="noStrike">
-                <a:solidFill>
-                  <a:srgbClr val="FFFFFF"/>
-                </a:solidFill>
-                <a:latin typeface="Calibri"/>
-                <a:ea typeface="Calibri"/>
-                <a:cs typeface="Calibri"/>
-                <a:sym typeface="Calibri"/>
-              </a:rPr>
-              <a:t>6</a:t>
-            </a:r>
-            <a:endParaRPr/>
-          </a:p>
-        </p:txBody>
-      </p:sp>
-      <p:sp>
-        <p:nvSpPr>
-          <p:cNvPr id="135" name="Google Shape;135;p16"/>
-          <p:cNvSpPr txBox="1"/>
-          <p:nvPr/>
-        </p:nvSpPr>
-        <p:spPr>
-          <a:xfrm>
-            <a:off x="1554480" y="5577840"/>
-            <a:ext cx="7315200" cy="384048"/>
-          </a:xfrm>
-          <a:prstGeom prst="rect">
-            <a:avLst/>
-          </a:prstGeom>
-          <a:noFill/>
-          <a:ln>
-            <a:noFill/>
-          </a:ln>
-        </p:spPr>
-        <p:txBody>
-          <a:bodyPr anchorCtr="0" anchor="t" bIns="45700" lIns="91425" spcFirstLastPara="1" rIns="91425" wrap="square" tIns="45700">
-            <a:spAutoFit/>
-          </a:bodyPr>
-          <a:lstStyle/>
-          <a:p>
-            <a:pPr indent="0" lvl="0" marL="0" marR="0" rtl="0" algn="l">
-              <a:spcBef>
-                <a:spcPts val="0"/>
-              </a:spcBef>
-              <a:spcAft>
-                <a:spcPts val="0"/>
-              </a:spcAft>
-              <a:buNone/>
-            </a:pPr>
-            <a:r>
-              <a:rPr b="1" i="0" lang="en-US" sz="1600" u="none" cap="none" strike="noStrike">
-                <a:solidFill>
-                  <a:srgbClr val="0E3A66"/>
-                </a:solidFill>
-                <a:latin typeface="Calibri"/>
-                <a:ea typeface="Calibri"/>
-                <a:cs typeface="Calibri"/>
-                <a:sym typeface="Calibri"/>
-              </a:rPr>
-              <a:t>Q&amp;A</a:t>
-            </a:r>
-            <a:endParaRPr/>
-          </a:p>
-        </p:txBody>
-      </p:sp>
-      <p:sp>
-        <p:nvSpPr>
-          <p:cNvPr id="136" name="Google Shape;136;p16"/>
-          <p:cNvSpPr txBox="1"/>
-          <p:nvPr/>
-        </p:nvSpPr>
-        <p:spPr>
-          <a:xfrm>
-            <a:off x="9601200" y="5577840"/>
-            <a:ext cx="1371600" cy="384048"/>
-          </a:xfrm>
-          <a:prstGeom prst="rect">
-            <a:avLst/>
-          </a:prstGeom>
-          <a:noFill/>
-          <a:ln>
-            <a:noFill/>
-          </a:ln>
-        </p:spPr>
-        <p:txBody>
-          <a:bodyPr anchorCtr="0" anchor="t" bIns="45700" lIns="91425" spcFirstLastPara="1" rIns="91425" wrap="square" tIns="45700">
-            <a:spAutoFit/>
-          </a:bodyPr>
-          <a:lstStyle/>
-          <a:p>
-            <a:pPr indent="0" lvl="0" marL="0" marR="0" rtl="0" algn="r">
-              <a:spcBef>
-                <a:spcPts val="0"/>
-              </a:spcBef>
-              <a:spcAft>
-                <a:spcPts val="0"/>
-              </a:spcAft>
-              <a:buNone/>
-            </a:pPr>
-            <a:r>
-              <a:rPr b="0" i="0" lang="en-US" sz="1400" u="none" cap="none" strike="noStrike">
-                <a:solidFill>
-                  <a:srgbClr val="0F766E"/>
-                </a:solidFill>
-                <a:latin typeface="Calibri"/>
-                <a:ea typeface="Calibri"/>
-                <a:cs typeface="Calibri"/>
-                <a:sym typeface="Calibri"/>
-              </a:rPr>
-              <a:t>15 min</a:t>
-            </a:r>
-            <a:endParaRPr/>
-          </a:p>
-        </p:txBody>
-      </p:sp>
+      </p:pic>
     </p:spTree>
   </p:cSld>
   <p:clrMapOvr>
@@ -49098,7 +49222,7 @@
         <p:spPr>
           <a:xfrm>
             <a:off x="274320" y="1463040"/>
-            <a:ext cx="2194560" cy="594360"/>
+            <a:ext cx="2194500" cy="594300"/>
           </a:xfrm>
           <a:prstGeom prst="roundRect">
             <a:avLst>
